--- a/ゲーム制作.pptx
+++ b/ゲーム制作.pptx
@@ -5,14 +5,15 @@
     <p:sldMasterId id="2147483648" r:id="rId1"/>
   </p:sldMasterIdLst>
   <p:notesMasterIdLst>
-    <p:notesMasterId r:id="rId7"/>
+    <p:notesMasterId r:id="rId8"/>
   </p:notesMasterIdLst>
   <p:sldIdLst>
     <p:sldId id="256" r:id="rId2"/>
-    <p:sldId id="257" r:id="rId3"/>
-    <p:sldId id="259" r:id="rId4"/>
-    <p:sldId id="258" r:id="rId5"/>
-    <p:sldId id="260" r:id="rId6"/>
+    <p:sldId id="259" r:id="rId3"/>
+    <p:sldId id="258" r:id="rId4"/>
+    <p:sldId id="260" r:id="rId5"/>
+    <p:sldId id="261" r:id="rId6"/>
+    <p:sldId id="257" r:id="rId7"/>
   </p:sldIdLst>
   <p:sldSz cx="12192000" cy="6858000"/>
   <p:notesSz cx="6858000" cy="9144000"/>
@@ -111,6 +112,11 @@
       </a:defRPr>
     </a:lvl9pPr>
   </p:defaultTextStyle>
+  <p:extLst>
+    <p:ext uri="{EFAFB233-063F-42B5-8137-9DF3F51BA10A}">
+      <p15:sldGuideLst xmlns:p15="http://schemas.microsoft.com/office/powerpoint/2012/main"/>
+    </p:ext>
+  </p:extLst>
 </p:presentation>
 </file>
 
@@ -196,7 +202,7 @@
           <a:p>
             <a:fld id="{5F437981-5096-4518-BF95-4CA6C8030B88}" type="datetimeFigureOut">
               <a:rPr kumimoji="1" lang="ja-JP" altLang="en-US" smtClean="0"/>
-              <a:t>2025/12/21</a:t>
+              <a:t>2025/12/22</a:t>
             </a:fld>
             <a:endParaRPr kumimoji="1" lang="ja-JP" altLang="en-US"/>
           </a:p>
@@ -726,7 +732,7 @@
           <a:p>
             <a:fld id="{4E60E38E-9C71-435A-AED7-FA148F390B6D}" type="datetimeFigureOut">
               <a:rPr kumimoji="1" lang="ja-JP" altLang="en-US" smtClean="0"/>
-              <a:t>2025/12/21</a:t>
+              <a:t>2025/12/22</a:t>
             </a:fld>
             <a:endParaRPr kumimoji="1" lang="ja-JP" altLang="en-US"/>
           </a:p>
@@ -956,7 +962,7 @@
           <a:p>
             <a:fld id="{4E60E38E-9C71-435A-AED7-FA148F390B6D}" type="datetimeFigureOut">
               <a:rPr kumimoji="1" lang="ja-JP" altLang="en-US" smtClean="0"/>
-              <a:t>2025/12/21</a:t>
+              <a:t>2025/12/22</a:t>
             </a:fld>
             <a:endParaRPr kumimoji="1" lang="ja-JP" altLang="en-US"/>
           </a:p>
@@ -1196,7 +1202,7 @@
           <a:p>
             <a:fld id="{4E60E38E-9C71-435A-AED7-FA148F390B6D}" type="datetimeFigureOut">
               <a:rPr kumimoji="1" lang="ja-JP" altLang="en-US" smtClean="0"/>
-              <a:t>2025/12/21</a:t>
+              <a:t>2025/12/22</a:t>
             </a:fld>
             <a:endParaRPr kumimoji="1" lang="ja-JP" altLang="en-US"/>
           </a:p>
@@ -1426,7 +1432,7 @@
           <a:p>
             <a:fld id="{4E60E38E-9C71-435A-AED7-FA148F390B6D}" type="datetimeFigureOut">
               <a:rPr kumimoji="1" lang="ja-JP" altLang="en-US" smtClean="0"/>
-              <a:t>2025/12/21</a:t>
+              <a:t>2025/12/22</a:t>
             </a:fld>
             <a:endParaRPr kumimoji="1" lang="ja-JP" altLang="en-US"/>
           </a:p>
@@ -1701,7 +1707,7 @@
           <a:p>
             <a:fld id="{4E60E38E-9C71-435A-AED7-FA148F390B6D}" type="datetimeFigureOut">
               <a:rPr kumimoji="1" lang="ja-JP" altLang="en-US" smtClean="0"/>
-              <a:t>2025/12/21</a:t>
+              <a:t>2025/12/22</a:t>
             </a:fld>
             <a:endParaRPr kumimoji="1" lang="ja-JP" altLang="en-US"/>
           </a:p>
@@ -2030,7 +2036,7 @@
           <a:p>
             <a:fld id="{4E60E38E-9C71-435A-AED7-FA148F390B6D}" type="datetimeFigureOut">
               <a:rPr kumimoji="1" lang="ja-JP" altLang="en-US" smtClean="0"/>
-              <a:t>2025/12/21</a:t>
+              <a:t>2025/12/22</a:t>
             </a:fld>
             <a:endParaRPr kumimoji="1" lang="ja-JP" altLang="en-US"/>
           </a:p>
@@ -2506,7 +2512,7 @@
           <a:p>
             <a:fld id="{4E60E38E-9C71-435A-AED7-FA148F390B6D}" type="datetimeFigureOut">
               <a:rPr kumimoji="1" lang="ja-JP" altLang="en-US" smtClean="0"/>
-              <a:t>2025/12/21</a:t>
+              <a:t>2025/12/22</a:t>
             </a:fld>
             <a:endParaRPr kumimoji="1" lang="ja-JP" altLang="en-US"/>
           </a:p>
@@ -2647,7 +2653,7 @@
           <a:p>
             <a:fld id="{4E60E38E-9C71-435A-AED7-FA148F390B6D}" type="datetimeFigureOut">
               <a:rPr kumimoji="1" lang="ja-JP" altLang="en-US" smtClean="0"/>
-              <a:t>2025/12/21</a:t>
+              <a:t>2025/12/22</a:t>
             </a:fld>
             <a:endParaRPr kumimoji="1" lang="ja-JP" altLang="en-US"/>
           </a:p>
@@ -2760,7 +2766,7 @@
           <a:p>
             <a:fld id="{4E60E38E-9C71-435A-AED7-FA148F390B6D}" type="datetimeFigureOut">
               <a:rPr kumimoji="1" lang="ja-JP" altLang="en-US" smtClean="0"/>
-              <a:t>2025/12/21</a:t>
+              <a:t>2025/12/22</a:t>
             </a:fld>
             <a:endParaRPr kumimoji="1" lang="ja-JP" altLang="en-US"/>
           </a:p>
@@ -3103,7 +3109,7 @@
           <a:p>
             <a:fld id="{4E60E38E-9C71-435A-AED7-FA148F390B6D}" type="datetimeFigureOut">
               <a:rPr kumimoji="1" lang="ja-JP" altLang="en-US" smtClean="0"/>
-              <a:t>2025/12/21</a:t>
+              <a:t>2025/12/22</a:t>
             </a:fld>
             <a:endParaRPr kumimoji="1" lang="ja-JP" altLang="en-US"/>
           </a:p>
@@ -3391,7 +3397,7 @@
           <a:p>
             <a:fld id="{4E60E38E-9C71-435A-AED7-FA148F390B6D}" type="datetimeFigureOut">
               <a:rPr kumimoji="1" lang="ja-JP" altLang="en-US" smtClean="0"/>
-              <a:t>2025/12/21</a:t>
+              <a:t>2025/12/22</a:t>
             </a:fld>
             <a:endParaRPr kumimoji="1" lang="ja-JP" altLang="en-US"/>
           </a:p>
@@ -3664,7 +3670,7 @@
           <a:p>
             <a:fld id="{4E60E38E-9C71-435A-AED7-FA148F390B6D}" type="datetimeFigureOut">
               <a:rPr kumimoji="1" lang="ja-JP" altLang="en-US" smtClean="0"/>
-              <a:t>2025/12/21</a:t>
+              <a:t>2025/12/22</a:t>
             </a:fld>
             <a:endParaRPr kumimoji="1" lang="ja-JP" altLang="en-US"/>
           </a:p>
@@ -4150,268 +4156,266 @@
       </p:grpSpPr>
       <p:sp>
         <p:nvSpPr>
-          <p:cNvPr id="6" name="テキスト ボックス 5">
-            <a:extLst>
-              <a:ext uri="{FF2B5EF4-FFF2-40B4-BE49-F238E27FC236}">
-                <a16:creationId xmlns:a16="http://schemas.microsoft.com/office/drawing/2014/main" id="{92D4A413-317E-1ACA-2AC1-43ED495D1A3C}"/>
-              </a:ext>
-            </a:extLst>
-          </p:cNvPr>
-          <p:cNvSpPr txBox="1"/>
-          <p:nvPr/>
+          <p:cNvPr id="2" name="タイトル 1">
+            <a:extLst>
+              <a:ext uri="{FF2B5EF4-FFF2-40B4-BE49-F238E27FC236}">
+                <a16:creationId xmlns:a16="http://schemas.microsoft.com/office/drawing/2014/main" id="{26EA9D20-6D25-9543-D04F-C8414DCC98BE}"/>
+              </a:ext>
+            </a:extLst>
+          </p:cNvPr>
+          <p:cNvSpPr>
+            <a:spLocks noGrp="1"/>
+          </p:cNvSpPr>
+          <p:nvPr>
+            <p:ph type="title"/>
+          </p:nvPr>
+        </p:nvSpPr>
+        <p:spPr/>
+        <p:txBody>
+          <a:bodyPr/>
+          <a:lstStyle/>
+          <a:p>
+            <a:r>
+              <a:rPr lang="ja-JP" altLang="en-US" b="1" dirty="0"/>
+              <a:t>やりたいことリスト</a:t>
+            </a:r>
+            <a:endParaRPr kumimoji="1" lang="ja-JP" altLang="en-US" b="1" dirty="0"/>
+          </a:p>
+        </p:txBody>
+      </p:sp>
+      <p:sp>
+        <p:nvSpPr>
+          <p:cNvPr id="3" name="コンテンツ プレースホルダー 2">
+            <a:extLst>
+              <a:ext uri="{FF2B5EF4-FFF2-40B4-BE49-F238E27FC236}">
+                <a16:creationId xmlns:a16="http://schemas.microsoft.com/office/drawing/2014/main" id="{BF389FE7-1AD8-A4EE-D12C-8898AA9BF775}"/>
+              </a:ext>
+            </a:extLst>
+          </p:cNvPr>
+          <p:cNvSpPr>
+            <a:spLocks noGrp="1"/>
+          </p:cNvSpPr>
+          <p:nvPr>
+            <p:ph idx="1"/>
+          </p:nvPr>
         </p:nvSpPr>
         <p:spPr>
           <a:xfrm>
-            <a:off x="129309" y="544945"/>
-            <a:ext cx="8691418" cy="523220"/>
+            <a:off x="838200" y="1465405"/>
+            <a:ext cx="10515600" cy="4759903"/>
           </a:xfrm>
-          <a:prstGeom prst="rect">
-            <a:avLst/>
-          </a:prstGeom>
-          <a:noFill/>
         </p:spPr>
         <p:txBody>
-          <a:bodyPr wrap="square" rtlCol="0">
-            <a:spAutoFit/>
+          <a:bodyPr>
+            <a:normAutofit fontScale="77500" lnSpcReduction="20000"/>
           </a:bodyPr>
           <a:lstStyle/>
           <a:p>
-            <a:r>
-              <a:rPr kumimoji="1" lang="ja-JP" altLang="en-US" sz="2800" b="1" dirty="0"/>
-              <a:t>横スクロールの２</a:t>
-            </a:r>
-            <a:r>
-              <a:rPr kumimoji="1" lang="en-US" altLang="ja-JP" sz="2800" b="1" dirty="0"/>
-              <a:t>D</a:t>
-            </a:r>
-            <a:r>
-              <a:rPr kumimoji="1" lang="ja-JP" altLang="en-US" sz="2800" b="1" dirty="0"/>
-              <a:t>ゲーム</a:t>
-            </a:r>
-          </a:p>
-        </p:txBody>
-      </p:sp>
-      <p:sp>
-        <p:nvSpPr>
-          <p:cNvPr id="7" name="テキスト ボックス 6">
-            <a:extLst>
-              <a:ext uri="{FF2B5EF4-FFF2-40B4-BE49-F238E27FC236}">
-                <a16:creationId xmlns:a16="http://schemas.microsoft.com/office/drawing/2014/main" id="{84A324D6-657F-3515-0F85-3305D74469AA}"/>
-              </a:ext>
-            </a:extLst>
-          </p:cNvPr>
-          <p:cNvSpPr txBox="1"/>
-          <p:nvPr/>
-        </p:nvSpPr>
-        <p:spPr>
-          <a:xfrm>
-            <a:off x="129309" y="914277"/>
-            <a:ext cx="7121236" cy="3108543"/>
-          </a:xfrm>
-          <a:prstGeom prst="rect">
-            <a:avLst/>
-          </a:prstGeom>
-          <a:noFill/>
-        </p:spPr>
-        <p:txBody>
-          <a:bodyPr wrap="square" rtlCol="0">
-            <a:spAutoFit/>
-          </a:bodyPr>
-          <a:lstStyle/>
-          <a:p>
-            <a:r>
-              <a:rPr lang="ja-JP" altLang="en-US" sz="2800" b="1" dirty="0"/>
-              <a:t>プレイヤーキャラは一体</a:t>
-            </a:r>
-            <a:endParaRPr lang="en-US" altLang="ja-JP" sz="2800" b="1" dirty="0"/>
-          </a:p>
-          <a:p>
-            <a:r>
-              <a:rPr lang="en-US" altLang="ja-JP" sz="2800" b="1" dirty="0"/>
-              <a:t>Level</a:t>
-            </a:r>
-          </a:p>
-          <a:p>
-            <a:r>
-              <a:rPr kumimoji="1" lang="en-US" altLang="ja-JP" sz="2800" b="1" dirty="0"/>
-              <a:t>Name</a:t>
-            </a:r>
-          </a:p>
-          <a:p>
-            <a:r>
-              <a:rPr lang="en-US" altLang="ja-JP" sz="2800" b="1" dirty="0"/>
-              <a:t>HP</a:t>
-            </a:r>
-          </a:p>
-          <a:p>
-            <a:r>
-              <a:rPr kumimoji="1" lang="en-US" altLang="ja-JP" sz="2800" b="1" dirty="0" err="1"/>
-              <a:t>Atk</a:t>
-            </a:r>
-            <a:endParaRPr kumimoji="1" lang="en-US" altLang="ja-JP" sz="2800" b="1" dirty="0"/>
-          </a:p>
-          <a:p>
-            <a:r>
-              <a:rPr kumimoji="1" lang="en-US" altLang="ja-JP" sz="2800" b="1" dirty="0"/>
-              <a:t>Def</a:t>
-            </a:r>
-          </a:p>
-          <a:p>
-            <a:r>
-              <a:rPr lang="en-US" altLang="ja-JP" sz="2800" b="1" dirty="0" err="1"/>
-              <a:t>Mp</a:t>
-            </a:r>
-            <a:endParaRPr kumimoji="1" lang="ja-JP" altLang="en-US" sz="2800" b="1" dirty="0"/>
-          </a:p>
-        </p:txBody>
-      </p:sp>
-      <p:sp>
-        <p:nvSpPr>
-          <p:cNvPr id="8" name="テキスト ボックス 7">
-            <a:extLst>
-              <a:ext uri="{FF2B5EF4-FFF2-40B4-BE49-F238E27FC236}">
-                <a16:creationId xmlns:a16="http://schemas.microsoft.com/office/drawing/2014/main" id="{8498BBFE-9475-621F-5F6B-4BA4D1CC1CA5}"/>
-              </a:ext>
-            </a:extLst>
-          </p:cNvPr>
-          <p:cNvSpPr txBox="1"/>
-          <p:nvPr/>
-        </p:nvSpPr>
-        <p:spPr>
-          <a:xfrm>
-            <a:off x="757381" y="4939845"/>
-            <a:ext cx="10584874" cy="523220"/>
-          </a:xfrm>
-          <a:prstGeom prst="rect">
-            <a:avLst/>
-          </a:prstGeom>
-          <a:noFill/>
-        </p:spPr>
-        <p:txBody>
-          <a:bodyPr wrap="square" rtlCol="0">
-            <a:spAutoFit/>
-          </a:bodyPr>
-          <a:lstStyle/>
-          <a:p>
-            <a:r>
-              <a:rPr lang="ja-JP" altLang="en-US" sz="2800" b="1" dirty="0"/>
-              <a:t>スキルは自分で好きなものをセット　スキルにレベルを持たせる</a:t>
-            </a:r>
-            <a:endParaRPr kumimoji="1" lang="ja-JP" altLang="en-US" sz="2800" b="1" dirty="0"/>
-          </a:p>
-        </p:txBody>
-      </p:sp>
-      <p:sp>
-        <p:nvSpPr>
-          <p:cNvPr id="9" name="テキスト ボックス 8">
-            <a:extLst>
-              <a:ext uri="{FF2B5EF4-FFF2-40B4-BE49-F238E27FC236}">
-                <a16:creationId xmlns:a16="http://schemas.microsoft.com/office/drawing/2014/main" id="{63219F4C-FF4D-3F95-0C61-D6EC58CCF6A2}"/>
-              </a:ext>
-            </a:extLst>
-          </p:cNvPr>
-          <p:cNvSpPr txBox="1"/>
-          <p:nvPr/>
-        </p:nvSpPr>
-        <p:spPr>
-          <a:xfrm>
-            <a:off x="757381" y="5318658"/>
-            <a:ext cx="10584874" cy="523220"/>
-          </a:xfrm>
-          <a:prstGeom prst="rect">
-            <a:avLst/>
-          </a:prstGeom>
-          <a:noFill/>
-        </p:spPr>
-        <p:txBody>
-          <a:bodyPr wrap="square" rtlCol="0">
-            <a:spAutoFit/>
-          </a:bodyPr>
-          <a:lstStyle/>
-          <a:p>
-            <a:r>
-              <a:rPr lang="ja-JP" altLang="en-US" sz="2800" b="1" dirty="0"/>
-              <a:t>スピリット　自動効果発動のもの</a:t>
-            </a:r>
-            <a:endParaRPr kumimoji="1" lang="ja-JP" altLang="en-US" sz="2800" b="1" dirty="0"/>
-          </a:p>
-        </p:txBody>
-      </p:sp>
-      <p:sp>
-        <p:nvSpPr>
-          <p:cNvPr id="10" name="テキスト ボックス 9">
-            <a:extLst>
-              <a:ext uri="{FF2B5EF4-FFF2-40B4-BE49-F238E27FC236}">
-                <a16:creationId xmlns:a16="http://schemas.microsoft.com/office/drawing/2014/main" id="{C1B95B66-2508-0177-A562-D97716488987}"/>
-              </a:ext>
-            </a:extLst>
-          </p:cNvPr>
-          <p:cNvSpPr txBox="1"/>
-          <p:nvPr/>
-        </p:nvSpPr>
-        <p:spPr>
-          <a:xfrm>
-            <a:off x="757381" y="4570512"/>
-            <a:ext cx="10584874" cy="523220"/>
-          </a:xfrm>
-          <a:prstGeom prst="rect">
-            <a:avLst/>
-          </a:prstGeom>
-          <a:noFill/>
-        </p:spPr>
-        <p:txBody>
-          <a:bodyPr wrap="square" rtlCol="0">
-            <a:spAutoFit/>
-          </a:bodyPr>
-          <a:lstStyle/>
-          <a:p>
-            <a:r>
-              <a:rPr kumimoji="1" lang="ja-JP" altLang="en-US" sz="2800" b="1" dirty="0"/>
-              <a:t>通常攻撃</a:t>
-            </a:r>
-          </a:p>
-        </p:txBody>
-      </p:sp>
-      <p:sp>
-        <p:nvSpPr>
-          <p:cNvPr id="11" name="テキスト ボックス 10">
-            <a:extLst>
-              <a:ext uri="{FF2B5EF4-FFF2-40B4-BE49-F238E27FC236}">
-                <a16:creationId xmlns:a16="http://schemas.microsoft.com/office/drawing/2014/main" id="{8B3B33B4-5D4C-CBCB-9C46-3749940306C1}"/>
-              </a:ext>
-            </a:extLst>
-          </p:cNvPr>
-          <p:cNvSpPr txBox="1"/>
-          <p:nvPr/>
-        </p:nvSpPr>
-        <p:spPr>
-          <a:xfrm>
-            <a:off x="757381" y="5789835"/>
-            <a:ext cx="10584874" cy="523220"/>
-          </a:xfrm>
-          <a:prstGeom prst="rect">
-            <a:avLst/>
-          </a:prstGeom>
-          <a:noFill/>
-        </p:spPr>
-        <p:txBody>
-          <a:bodyPr wrap="square" rtlCol="0">
-            <a:spAutoFit/>
-          </a:bodyPr>
-          <a:lstStyle/>
-          <a:p>
-            <a:r>
-              <a:rPr lang="ja-JP" altLang="en-US" sz="2800" b="1" dirty="0"/>
-              <a:t>余裕があればパッシブツリーの作成</a:t>
-            </a:r>
-            <a:endParaRPr kumimoji="1" lang="ja-JP" altLang="en-US" sz="2800" b="1" dirty="0"/>
+            <a:pPr marL="0" indent="0">
+              <a:buNone/>
+            </a:pPr>
+            <a:r>
+              <a:rPr lang="en-US" altLang="ja-JP" b="1" dirty="0"/>
+              <a:t>1:</a:t>
+            </a:r>
+            <a:r>
+              <a:rPr lang="ja-JP" altLang="en-US" b="1" dirty="0"/>
+              <a:t>カメラの制御</a:t>
+            </a:r>
+            <a:endParaRPr lang="en-US" altLang="ja-JP" b="1" dirty="0"/>
+          </a:p>
+          <a:p>
+            <a:pPr marL="0" indent="0">
+              <a:buNone/>
+            </a:pPr>
+            <a:r>
+              <a:rPr kumimoji="1" lang="en-US" altLang="ja-JP" b="1" dirty="0"/>
+              <a:t>	</a:t>
+            </a:r>
+            <a:r>
+              <a:rPr kumimoji="1" lang="ja-JP" altLang="en-US" b="1" dirty="0"/>
+              <a:t>ゲームにおいてカメラの見せ方は面白さにつながる</a:t>
+            </a:r>
+            <a:endParaRPr kumimoji="1" lang="en-US" altLang="ja-JP" b="1" dirty="0"/>
+          </a:p>
+          <a:p>
+            <a:pPr marL="0" indent="0">
+              <a:buNone/>
+            </a:pPr>
+            <a:r>
+              <a:rPr lang="en-US" altLang="ja-JP" b="1" dirty="0"/>
+              <a:t>	</a:t>
+            </a:r>
+            <a:r>
+              <a:rPr lang="ja-JP" altLang="en-US" b="1" dirty="0"/>
+              <a:t>なので今回カメラの制御をする</a:t>
+            </a:r>
+            <a:endParaRPr lang="en-US" altLang="ja-JP" b="1" dirty="0"/>
+          </a:p>
+          <a:p>
+            <a:pPr marL="0" indent="0">
+              <a:buNone/>
+            </a:pPr>
+            <a:r>
+              <a:rPr kumimoji="1" lang="en-US" altLang="ja-JP" b="1" dirty="0"/>
+              <a:t>2:SFML</a:t>
+            </a:r>
+            <a:r>
+              <a:rPr kumimoji="1" lang="ja-JP" altLang="en-US" b="1" dirty="0"/>
+              <a:t>のシェーダーに触れる</a:t>
+            </a:r>
+            <a:endParaRPr kumimoji="1" lang="en-US" altLang="ja-JP" b="1" dirty="0"/>
+          </a:p>
+          <a:p>
+            <a:pPr marL="0" indent="0">
+              <a:buNone/>
+            </a:pPr>
+            <a:r>
+              <a:rPr lang="en-US" altLang="ja-JP" b="1" dirty="0"/>
+              <a:t>3:</a:t>
+            </a:r>
+            <a:r>
+              <a:rPr lang="ja-JP" altLang="en-US" b="1" dirty="0"/>
+              <a:t>デバックを快適にする</a:t>
+            </a:r>
+            <a:endParaRPr lang="en-US" altLang="ja-JP" b="1" dirty="0"/>
+          </a:p>
+          <a:p>
+            <a:pPr marL="0" indent="0">
+              <a:buNone/>
+            </a:pPr>
+            <a:r>
+              <a:rPr lang="en-US" altLang="ja-JP" b="1" dirty="0"/>
+              <a:t>	</a:t>
+            </a:r>
+            <a:r>
+              <a:rPr lang="ja-JP" altLang="en-US" b="1" dirty="0"/>
+              <a:t>実行中に変更したり</a:t>
+            </a:r>
+            <a:r>
+              <a:rPr lang="en-US" altLang="ja-JP" b="1" dirty="0" err="1"/>
+              <a:t>spdlog</a:t>
+            </a:r>
+            <a:r>
+              <a:rPr lang="ja-JP" altLang="en-US" b="1" dirty="0"/>
+              <a:t>を使ってログの表示</a:t>
+            </a:r>
+            <a:endParaRPr lang="en-US" altLang="ja-JP" b="1" dirty="0"/>
+          </a:p>
+          <a:p>
+            <a:pPr marL="0" indent="0">
+              <a:buNone/>
+            </a:pPr>
+            <a:r>
+              <a:rPr lang="en-US" altLang="ja-JP" b="1" dirty="0"/>
+              <a:t>	</a:t>
+            </a:r>
+            <a:r>
+              <a:rPr lang="ja-JP" altLang="en-US" b="1" dirty="0"/>
+              <a:t>ログをファイルに出力</a:t>
+            </a:r>
+            <a:endParaRPr lang="en-US" altLang="ja-JP" b="1" dirty="0"/>
+          </a:p>
+          <a:p>
+            <a:pPr marL="0" indent="0">
+              <a:buNone/>
+            </a:pPr>
+            <a:r>
+              <a:rPr lang="en-US" altLang="ja-JP" b="1" dirty="0"/>
+              <a:t>	</a:t>
+            </a:r>
+            <a:r>
+              <a:rPr lang="ja-JP" altLang="en-US" b="1" dirty="0"/>
+              <a:t>実行中にマップ作製</a:t>
+            </a:r>
+            <a:endParaRPr lang="en-US" altLang="ja-JP" b="1" dirty="0"/>
+          </a:p>
+          <a:p>
+            <a:pPr marL="0" indent="0">
+              <a:buNone/>
+            </a:pPr>
+            <a:r>
+              <a:rPr lang="en-US" altLang="ja-JP" b="1" dirty="0"/>
+              <a:t>4:ImGui</a:t>
+            </a:r>
+            <a:r>
+              <a:rPr lang="ja-JP" altLang="en-US" b="1" dirty="0"/>
+              <a:t>のノードに触れる</a:t>
+            </a:r>
+            <a:endParaRPr lang="en-US" altLang="ja-JP" b="1" dirty="0"/>
+          </a:p>
+          <a:p>
+            <a:pPr marL="0" indent="0">
+              <a:buNone/>
+            </a:pPr>
+            <a:r>
+              <a:rPr lang="en-US" altLang="ja-JP" b="1" dirty="0"/>
+              <a:t>5:</a:t>
+            </a:r>
+            <a:r>
+              <a:rPr lang="ja-JP" altLang="en-US" b="1" dirty="0"/>
+              <a:t>設定</a:t>
+            </a:r>
+            <a:endParaRPr lang="en-US" altLang="ja-JP" b="1" dirty="0"/>
+          </a:p>
+          <a:p>
+            <a:pPr marL="0" indent="0">
+              <a:buNone/>
+            </a:pPr>
+            <a:r>
+              <a:rPr lang="en-US" altLang="ja-JP" b="1" dirty="0"/>
+              <a:t>	config</a:t>
+            </a:r>
+            <a:r>
+              <a:rPr lang="ja-JP" altLang="en-US" b="1" dirty="0"/>
+              <a:t>を作ってウィンドウサイズの設定</a:t>
+            </a:r>
+            <a:endParaRPr lang="en-US" altLang="ja-JP" b="1" dirty="0"/>
+          </a:p>
+          <a:p>
+            <a:pPr marL="0" indent="0">
+              <a:buNone/>
+            </a:pPr>
+            <a:r>
+              <a:rPr lang="en-US" altLang="ja-JP" b="1" dirty="0"/>
+              <a:t>	</a:t>
+            </a:r>
+            <a:r>
+              <a:rPr lang="en-US" altLang="ja-JP" b="1" dirty="0" err="1"/>
+              <a:t>pad,key</a:t>
+            </a:r>
+            <a:r>
+              <a:rPr lang="ja-JP" altLang="en-US" b="1" dirty="0"/>
+              <a:t>切り替え</a:t>
+            </a:r>
+            <a:endParaRPr lang="en-US" altLang="ja-JP" b="1" dirty="0"/>
+          </a:p>
+          <a:p>
+            <a:pPr marL="0" indent="0">
+              <a:buNone/>
+            </a:pPr>
+            <a:r>
+              <a:rPr lang="en-US" altLang="ja-JP" b="1" dirty="0"/>
+              <a:t>	</a:t>
+            </a:r>
+            <a:r>
+              <a:rPr lang="ja-JP" altLang="en-US" b="1" dirty="0"/>
+              <a:t>言語</a:t>
+            </a:r>
+            <a:endParaRPr lang="en-US" altLang="ja-JP" b="1" dirty="0"/>
+          </a:p>
+          <a:p>
+            <a:pPr marL="0" indent="0">
+              <a:buNone/>
+            </a:pPr>
+            <a:endParaRPr lang="en-US" altLang="ja-JP" b="1" dirty="0"/>
           </a:p>
         </p:txBody>
       </p:sp>
     </p:spTree>
     <p:extLst>
       <p:ext uri="{BB962C8B-B14F-4D97-AF65-F5344CB8AC3E}">
-        <p14:creationId xmlns:p14="http://schemas.microsoft.com/office/powerpoint/2010/main" val="1909179945"/>
+        <p14:creationId xmlns:p14="http://schemas.microsoft.com/office/powerpoint/2010/main" val="936635747"/>
       </p:ext>
     </p:extLst>
   </p:cSld>
@@ -4438,294 +4442,6 @@
           <a:chExt cx="0" cy="0"/>
         </a:xfrm>
       </p:grpSpPr>
-      <p:sp>
-        <p:nvSpPr>
-          <p:cNvPr id="2" name="タイトル 1">
-            <a:extLst>
-              <a:ext uri="{FF2B5EF4-FFF2-40B4-BE49-F238E27FC236}">
-                <a16:creationId xmlns:a16="http://schemas.microsoft.com/office/drawing/2014/main" id="{26EA9D20-6D25-9543-D04F-C8414DCC98BE}"/>
-              </a:ext>
-            </a:extLst>
-          </p:cNvPr>
-          <p:cNvSpPr>
-            <a:spLocks noGrp="1"/>
-          </p:cNvSpPr>
-          <p:nvPr>
-            <p:ph type="title"/>
-          </p:nvPr>
-        </p:nvSpPr>
-        <p:spPr/>
-        <p:txBody>
-          <a:bodyPr/>
-          <a:lstStyle/>
-          <a:p>
-            <a:r>
-              <a:rPr lang="ja-JP" altLang="en-US" b="1" dirty="0"/>
-              <a:t>やりたいことリスト</a:t>
-            </a:r>
-            <a:endParaRPr kumimoji="1" lang="ja-JP" altLang="en-US" b="1" dirty="0"/>
-          </a:p>
-        </p:txBody>
-      </p:sp>
-      <p:sp>
-        <p:nvSpPr>
-          <p:cNvPr id="3" name="コンテンツ プレースホルダー 2">
-            <a:extLst>
-              <a:ext uri="{FF2B5EF4-FFF2-40B4-BE49-F238E27FC236}">
-                <a16:creationId xmlns:a16="http://schemas.microsoft.com/office/drawing/2014/main" id="{BF389FE7-1AD8-A4EE-D12C-8898AA9BF775}"/>
-              </a:ext>
-            </a:extLst>
-          </p:cNvPr>
-          <p:cNvSpPr>
-            <a:spLocks noGrp="1"/>
-          </p:cNvSpPr>
-          <p:nvPr>
-            <p:ph idx="1"/>
-          </p:nvPr>
-        </p:nvSpPr>
-        <p:spPr>
-          <a:xfrm>
-            <a:off x="838200" y="1465405"/>
-            <a:ext cx="10515600" cy="4759903"/>
-          </a:xfrm>
-        </p:spPr>
-        <p:txBody>
-          <a:bodyPr>
-            <a:normAutofit fontScale="77500" lnSpcReduction="20000"/>
-          </a:bodyPr>
-          <a:lstStyle/>
-          <a:p>
-            <a:pPr marL="0" indent="0">
-              <a:buNone/>
-            </a:pPr>
-            <a:r>
-              <a:rPr lang="en-US" altLang="ja-JP" b="1" dirty="0"/>
-              <a:t>1:</a:t>
-            </a:r>
-            <a:r>
-              <a:rPr lang="ja-JP" altLang="en-US" b="1" dirty="0"/>
-              <a:t>カメラの制御</a:t>
-            </a:r>
-            <a:endParaRPr lang="en-US" altLang="ja-JP" b="1" dirty="0"/>
-          </a:p>
-          <a:p>
-            <a:pPr marL="0" indent="0">
-              <a:buNone/>
-            </a:pPr>
-            <a:r>
-              <a:rPr kumimoji="1" lang="en-US" altLang="ja-JP" b="1" dirty="0"/>
-              <a:t>	</a:t>
-            </a:r>
-            <a:r>
-              <a:rPr kumimoji="1" lang="ja-JP" altLang="en-US" b="1" dirty="0"/>
-              <a:t>ゲームにおいてカメラの見せ方は面白さにつながる</a:t>
-            </a:r>
-            <a:endParaRPr kumimoji="1" lang="en-US" altLang="ja-JP" b="1" dirty="0"/>
-          </a:p>
-          <a:p>
-            <a:pPr marL="0" indent="0">
-              <a:buNone/>
-            </a:pPr>
-            <a:r>
-              <a:rPr lang="en-US" altLang="ja-JP" b="1" dirty="0"/>
-              <a:t>	</a:t>
-            </a:r>
-            <a:r>
-              <a:rPr lang="ja-JP" altLang="en-US" b="1" dirty="0"/>
-              <a:t>なので今回カメラの制御をする</a:t>
-            </a:r>
-            <a:endParaRPr lang="en-US" altLang="ja-JP" b="1" dirty="0"/>
-          </a:p>
-          <a:p>
-            <a:pPr marL="0" indent="0">
-              <a:buNone/>
-            </a:pPr>
-            <a:r>
-              <a:rPr kumimoji="1" lang="en-US" altLang="ja-JP" b="1" dirty="0"/>
-              <a:t>2:SFML</a:t>
-            </a:r>
-            <a:r>
-              <a:rPr kumimoji="1" lang="ja-JP" altLang="en-US" b="1" dirty="0"/>
-              <a:t>のシェーダーに触れる</a:t>
-            </a:r>
-            <a:endParaRPr kumimoji="1" lang="en-US" altLang="ja-JP" b="1" dirty="0"/>
-          </a:p>
-          <a:p>
-            <a:pPr marL="0" indent="0">
-              <a:buNone/>
-            </a:pPr>
-            <a:r>
-              <a:rPr lang="en-US" altLang="ja-JP" b="1" dirty="0"/>
-              <a:t>3:</a:t>
-            </a:r>
-            <a:r>
-              <a:rPr lang="ja-JP" altLang="en-US" b="1" dirty="0"/>
-              <a:t>デバックを快適にする</a:t>
-            </a:r>
-            <a:endParaRPr lang="en-US" altLang="ja-JP" b="1" dirty="0"/>
-          </a:p>
-          <a:p>
-            <a:pPr marL="0" indent="0">
-              <a:buNone/>
-            </a:pPr>
-            <a:r>
-              <a:rPr lang="en-US" altLang="ja-JP" b="1" dirty="0"/>
-              <a:t>	</a:t>
-            </a:r>
-            <a:r>
-              <a:rPr lang="ja-JP" altLang="en-US" b="1" dirty="0"/>
-              <a:t>実行中に変更したり</a:t>
-            </a:r>
-            <a:r>
-              <a:rPr lang="en-US" altLang="ja-JP" b="1" dirty="0" err="1"/>
-              <a:t>spdlog</a:t>
-            </a:r>
-            <a:r>
-              <a:rPr lang="ja-JP" altLang="en-US" b="1" dirty="0"/>
-              <a:t>を使ってログの表示</a:t>
-            </a:r>
-            <a:endParaRPr lang="en-US" altLang="ja-JP" b="1" dirty="0"/>
-          </a:p>
-          <a:p>
-            <a:pPr marL="0" indent="0">
-              <a:buNone/>
-            </a:pPr>
-            <a:r>
-              <a:rPr lang="en-US" altLang="ja-JP" b="1" dirty="0"/>
-              <a:t>	</a:t>
-            </a:r>
-            <a:r>
-              <a:rPr lang="ja-JP" altLang="en-US" b="1" dirty="0"/>
-              <a:t>ログをファイルに出力</a:t>
-            </a:r>
-            <a:endParaRPr lang="en-US" altLang="ja-JP" b="1" dirty="0"/>
-          </a:p>
-          <a:p>
-            <a:pPr marL="0" indent="0">
-              <a:buNone/>
-            </a:pPr>
-            <a:r>
-              <a:rPr lang="en-US" altLang="ja-JP" b="1" dirty="0"/>
-              <a:t>	</a:t>
-            </a:r>
-            <a:r>
-              <a:rPr lang="ja-JP" altLang="en-US" b="1" dirty="0"/>
-              <a:t>実行中にマップ作製</a:t>
-            </a:r>
-            <a:endParaRPr lang="en-US" altLang="ja-JP" b="1" dirty="0"/>
-          </a:p>
-          <a:p>
-            <a:pPr marL="0" indent="0">
-              <a:buNone/>
-            </a:pPr>
-            <a:r>
-              <a:rPr lang="en-US" altLang="ja-JP" b="1" dirty="0"/>
-              <a:t>4:ImGui</a:t>
-            </a:r>
-            <a:r>
-              <a:rPr lang="ja-JP" altLang="en-US" b="1" dirty="0"/>
-              <a:t>のノードに触れる</a:t>
-            </a:r>
-            <a:endParaRPr lang="en-US" altLang="ja-JP" b="1" dirty="0"/>
-          </a:p>
-          <a:p>
-            <a:pPr marL="0" indent="0">
-              <a:buNone/>
-            </a:pPr>
-            <a:r>
-              <a:rPr lang="en-US" altLang="ja-JP" b="1" dirty="0"/>
-              <a:t>5:</a:t>
-            </a:r>
-            <a:r>
-              <a:rPr lang="ja-JP" altLang="en-US" b="1" dirty="0"/>
-              <a:t>設定</a:t>
-            </a:r>
-            <a:endParaRPr lang="en-US" altLang="ja-JP" b="1" dirty="0"/>
-          </a:p>
-          <a:p>
-            <a:pPr marL="0" indent="0">
-              <a:buNone/>
-            </a:pPr>
-            <a:r>
-              <a:rPr lang="en-US" altLang="ja-JP" b="1" dirty="0"/>
-              <a:t>	config</a:t>
-            </a:r>
-            <a:r>
-              <a:rPr lang="ja-JP" altLang="en-US" b="1" dirty="0"/>
-              <a:t>を作ってウィンドウサイズの設定</a:t>
-            </a:r>
-            <a:endParaRPr lang="en-US" altLang="ja-JP" b="1" dirty="0"/>
-          </a:p>
-          <a:p>
-            <a:pPr marL="0" indent="0">
-              <a:buNone/>
-            </a:pPr>
-            <a:r>
-              <a:rPr lang="en-US" altLang="ja-JP" b="1" dirty="0"/>
-              <a:t>	</a:t>
-            </a:r>
-            <a:r>
-              <a:rPr lang="en-US" altLang="ja-JP" b="1" dirty="0" err="1"/>
-              <a:t>pad,key</a:t>
-            </a:r>
-            <a:r>
-              <a:rPr lang="ja-JP" altLang="en-US" b="1" dirty="0"/>
-              <a:t>切り替え</a:t>
-            </a:r>
-            <a:endParaRPr lang="en-US" altLang="ja-JP" b="1" dirty="0"/>
-          </a:p>
-          <a:p>
-            <a:pPr marL="0" indent="0">
-              <a:buNone/>
-            </a:pPr>
-            <a:r>
-              <a:rPr lang="en-US" altLang="ja-JP" b="1" dirty="0"/>
-              <a:t>	</a:t>
-            </a:r>
-            <a:r>
-              <a:rPr lang="ja-JP" altLang="en-US" b="1" dirty="0"/>
-              <a:t>言語</a:t>
-            </a:r>
-            <a:endParaRPr lang="en-US" altLang="ja-JP" b="1" dirty="0"/>
-          </a:p>
-          <a:p>
-            <a:pPr marL="0" indent="0">
-              <a:buNone/>
-            </a:pPr>
-            <a:endParaRPr lang="en-US" altLang="ja-JP" b="1" dirty="0"/>
-          </a:p>
-        </p:txBody>
-      </p:sp>
-    </p:spTree>
-    <p:extLst>
-      <p:ext uri="{BB962C8B-B14F-4D97-AF65-F5344CB8AC3E}">
-        <p14:creationId xmlns:p14="http://schemas.microsoft.com/office/powerpoint/2010/main" val="936635747"/>
-      </p:ext>
-    </p:extLst>
-  </p:cSld>
-  <p:clrMapOvr>
-    <a:masterClrMapping/>
-  </p:clrMapOvr>
-</p:sld>
-</file>
-
-<file path=ppt/slides/slide4.xml><?xml version="1.0" encoding="utf-8"?>
-<p:sld xmlns:a="http://schemas.openxmlformats.org/drawingml/2006/main" xmlns:r="http://schemas.openxmlformats.org/officeDocument/2006/relationships" xmlns:p="http://schemas.openxmlformats.org/presentationml/2006/main">
-  <p:cSld>
-    <p:spTree>
-      <p:nvGrpSpPr>
-        <p:cNvPr id="1" name=""/>
-        <p:cNvGrpSpPr/>
-        <p:nvPr/>
-      </p:nvGrpSpPr>
-      <p:grpSpPr>
-        <a:xfrm>
-          <a:off x="0" y="0"/>
-          <a:ext cx="0" cy="0"/>
-          <a:chOff x="0" y="0"/>
-          <a:chExt cx="0" cy="0"/>
-        </a:xfrm>
-      </p:grpSpPr>
       <p:pic>
         <p:nvPicPr>
           <p:cNvPr id="1026" name="Picture 2" descr="Working in 2D Map news - ModDB">
@@ -4755,7 +4471,7 @@
         </p:blipFill>
         <p:spPr bwMode="auto">
           <a:xfrm>
-            <a:off x="978617" y="796751"/>
+            <a:off x="315229" y="1553206"/>
             <a:ext cx="6538714" cy="3751587"/>
           </a:xfrm>
           <a:prstGeom prst="rect">
@@ -4802,7 +4518,7 @@
         </p:blipFill>
         <p:spPr bwMode="auto">
           <a:xfrm>
-            <a:off x="8732813" y="1238044"/>
+            <a:off x="8616272" y="2711749"/>
             <a:ext cx="2284573" cy="1434500"/>
           </a:xfrm>
           <a:prstGeom prst="rect">
@@ -4834,7 +4550,7 @@
         </p:nvSpPr>
         <p:spPr>
           <a:xfrm>
-            <a:off x="7777113" y="877097"/>
+            <a:off x="7561959" y="2210355"/>
             <a:ext cx="4195975" cy="369332"/>
           </a:xfrm>
           <a:prstGeom prst="rect">
@@ -4852,6 +4568,42 @@
             <a:r>
               <a:rPr kumimoji="1" lang="ja-JP" altLang="en-US" b="1" dirty="0"/>
               <a:t>カメラの制御</a:t>
+            </a:r>
+          </a:p>
+        </p:txBody>
+      </p:sp>
+      <p:sp>
+        <p:nvSpPr>
+          <p:cNvPr id="6" name="テキスト ボックス 5">
+            <a:extLst>
+              <a:ext uri="{FF2B5EF4-FFF2-40B4-BE49-F238E27FC236}">
+                <a16:creationId xmlns:a16="http://schemas.microsoft.com/office/drawing/2014/main" id="{B1969684-844E-4FB2-8E17-CAC9FDE7EF89}"/>
+              </a:ext>
+            </a:extLst>
+          </p:cNvPr>
+          <p:cNvSpPr txBox="1"/>
+          <p:nvPr/>
+        </p:nvSpPr>
+        <p:spPr>
+          <a:xfrm>
+            <a:off x="7561960" y="4462979"/>
+            <a:ext cx="4195975" cy="646331"/>
+          </a:xfrm>
+          <a:prstGeom prst="rect">
+            <a:avLst/>
+          </a:prstGeom>
+          <a:noFill/>
+        </p:spPr>
+        <p:txBody>
+          <a:bodyPr wrap="square" rtlCol="0">
+            <a:spAutoFit/>
+          </a:bodyPr>
+          <a:lstStyle/>
+          <a:p>
+            <a:pPr algn="ctr"/>
+            <a:r>
+              <a:rPr kumimoji="1" lang="ja-JP" altLang="en-US" b="1" dirty="0"/>
+              <a:t>カメラのズームイン、アウトを利用してゲーム内で動きをつける</a:t>
             </a:r>
           </a:p>
         </p:txBody>
@@ -4869,7 +4621,7 @@
 </p:sld>
 </file>
 
-<file path=ppt/slides/slide5.xml><?xml version="1.0" encoding="utf-8"?>
+<file path=ppt/slides/slide4.xml><?xml version="1.0" encoding="utf-8"?>
 <p:sld xmlns:a="http://schemas.openxmlformats.org/drawingml/2006/main" xmlns:r="http://schemas.openxmlformats.org/officeDocument/2006/relationships" xmlns:p="http://schemas.openxmlformats.org/presentationml/2006/main">
   <p:cSld>
     <p:spTree>
@@ -5026,13 +4778,15 @@
               <a:avLst/>
             </a:prstGeom>
             <a:solidFill>
-              <a:schemeClr val="tx2">
-                <a:lumMod val="90000"/>
-                <a:lumOff val="10000"/>
+              <a:schemeClr val="accent4">
+                <a:lumMod val="40000"/>
+                <a:lumOff val="60000"/>
               </a:schemeClr>
             </a:solidFill>
             <a:ln>
-              <a:noFill/>
+              <a:solidFill>
+                <a:schemeClr val="accent2"/>
+              </a:solidFill>
             </a:ln>
           </p:spPr>
           <p:style>
@@ -5080,6 +4834,17 @@
             <a:prstGeom prst="rect">
               <a:avLst/>
             </a:prstGeom>
+            <a:solidFill>
+              <a:schemeClr val="accent4">
+                <a:lumMod val="40000"/>
+                <a:lumOff val="60000"/>
+              </a:schemeClr>
+            </a:solidFill>
+            <a:ln>
+              <a:solidFill>
+                <a:schemeClr val="accent2"/>
+              </a:solidFill>
+            </a:ln>
           </p:spPr>
           <p:style>
             <a:lnRef idx="2">
@@ -5126,6 +4891,17 @@
             <a:prstGeom prst="rect">
               <a:avLst/>
             </a:prstGeom>
+            <a:solidFill>
+              <a:schemeClr val="accent4">
+                <a:lumMod val="40000"/>
+                <a:lumOff val="60000"/>
+              </a:schemeClr>
+            </a:solidFill>
+            <a:ln>
+              <a:solidFill>
+                <a:schemeClr val="accent2"/>
+              </a:solidFill>
+            </a:ln>
           </p:spPr>
           <p:style>
             <a:lnRef idx="2">
@@ -5172,6 +4948,17 @@
             <a:prstGeom prst="rect">
               <a:avLst/>
             </a:prstGeom>
+            <a:solidFill>
+              <a:schemeClr val="accent4">
+                <a:lumMod val="40000"/>
+                <a:lumOff val="60000"/>
+              </a:schemeClr>
+            </a:solidFill>
+            <a:ln>
+              <a:solidFill>
+                <a:schemeClr val="accent2"/>
+              </a:solidFill>
+            </a:ln>
           </p:spPr>
           <p:style>
             <a:lnRef idx="2">
@@ -5218,6 +5005,17 @@
             <a:prstGeom prst="rect">
               <a:avLst/>
             </a:prstGeom>
+            <a:solidFill>
+              <a:schemeClr val="accent4">
+                <a:lumMod val="40000"/>
+                <a:lumOff val="60000"/>
+              </a:schemeClr>
+            </a:solidFill>
+            <a:ln>
+              <a:solidFill>
+                <a:schemeClr val="accent2"/>
+              </a:solidFill>
+            </a:ln>
           </p:spPr>
           <p:style>
             <a:lnRef idx="2">
@@ -5264,6 +5062,17 @@
             <a:prstGeom prst="rect">
               <a:avLst/>
             </a:prstGeom>
+            <a:solidFill>
+              <a:schemeClr val="accent4">
+                <a:lumMod val="40000"/>
+                <a:lumOff val="60000"/>
+              </a:schemeClr>
+            </a:solidFill>
+            <a:ln>
+              <a:solidFill>
+                <a:schemeClr val="accent2"/>
+              </a:solidFill>
+            </a:ln>
           </p:spPr>
           <p:style>
             <a:lnRef idx="2">
@@ -5310,6 +5119,17 @@
             <a:prstGeom prst="rect">
               <a:avLst/>
             </a:prstGeom>
+            <a:solidFill>
+              <a:schemeClr val="accent4">
+                <a:lumMod val="40000"/>
+                <a:lumOff val="60000"/>
+              </a:schemeClr>
+            </a:solidFill>
+            <a:ln>
+              <a:solidFill>
+                <a:schemeClr val="accent2"/>
+              </a:solidFill>
+            </a:ln>
           </p:spPr>
           <p:style>
             <a:lnRef idx="2">
@@ -5356,6 +5176,17 @@
             <a:prstGeom prst="rect">
               <a:avLst/>
             </a:prstGeom>
+            <a:solidFill>
+              <a:schemeClr val="accent4">
+                <a:lumMod val="40000"/>
+                <a:lumOff val="60000"/>
+              </a:schemeClr>
+            </a:solidFill>
+            <a:ln>
+              <a:solidFill>
+                <a:schemeClr val="accent2"/>
+              </a:solidFill>
+            </a:ln>
           </p:spPr>
           <p:style>
             <a:lnRef idx="2">
@@ -5501,10 +5332,486 @@
           </a:p>
         </p:txBody>
       </p:sp>
+      <p:sp>
+        <p:nvSpPr>
+          <p:cNvPr id="2" name="楕円 1">
+            <a:extLst>
+              <a:ext uri="{FF2B5EF4-FFF2-40B4-BE49-F238E27FC236}">
+                <a16:creationId xmlns:a16="http://schemas.microsoft.com/office/drawing/2014/main" id="{988E75D1-E5E5-4759-8416-5E30EB64A1FF}"/>
+              </a:ext>
+            </a:extLst>
+          </p:cNvPr>
+          <p:cNvSpPr/>
+          <p:nvPr/>
+        </p:nvSpPr>
+        <p:spPr>
+          <a:xfrm>
+            <a:off x="5843631" y="3962400"/>
+            <a:ext cx="504738" cy="504738"/>
+          </a:xfrm>
+          <a:prstGeom prst="ellipse">
+            <a:avLst/>
+          </a:prstGeom>
+          <a:solidFill>
+            <a:schemeClr val="accent4">
+              <a:lumMod val="40000"/>
+              <a:lumOff val="60000"/>
+            </a:schemeClr>
+          </a:solidFill>
+          <a:ln>
+            <a:noFill/>
+          </a:ln>
+        </p:spPr>
+        <p:style>
+          <a:lnRef idx="2">
+            <a:schemeClr val="accent1">
+              <a:shade val="50000"/>
+            </a:schemeClr>
+          </a:lnRef>
+          <a:fillRef idx="1">
+            <a:schemeClr val="accent1"/>
+          </a:fillRef>
+          <a:effectRef idx="0">
+            <a:schemeClr val="accent1"/>
+          </a:effectRef>
+          <a:fontRef idx="minor">
+            <a:schemeClr val="lt1"/>
+          </a:fontRef>
+        </p:style>
+        <p:txBody>
+          <a:bodyPr rtlCol="0" anchor="ctr"/>
+          <a:lstStyle/>
+          <a:p>
+            <a:pPr algn="ctr"/>
+            <a:endParaRPr kumimoji="1" lang="ja-JP" altLang="en-US"/>
+          </a:p>
+        </p:txBody>
+      </p:sp>
     </p:spTree>
     <p:extLst>
       <p:ext uri="{BB962C8B-B14F-4D97-AF65-F5344CB8AC3E}">
         <p14:creationId xmlns:p14="http://schemas.microsoft.com/office/powerpoint/2010/main" val="3747011141"/>
+      </p:ext>
+    </p:extLst>
+  </p:cSld>
+  <p:clrMapOvr>
+    <a:masterClrMapping/>
+  </p:clrMapOvr>
+</p:sld>
+</file>
+
+<file path=ppt/slides/slide5.xml><?xml version="1.0" encoding="utf-8"?>
+<p:sld xmlns:a="http://schemas.openxmlformats.org/drawingml/2006/main" xmlns:r="http://schemas.openxmlformats.org/officeDocument/2006/relationships" xmlns:p="http://schemas.openxmlformats.org/presentationml/2006/main">
+  <p:cSld>
+    <p:spTree>
+      <p:nvGrpSpPr>
+        <p:cNvPr id="1" name=""/>
+        <p:cNvGrpSpPr/>
+        <p:nvPr/>
+      </p:nvGrpSpPr>
+      <p:grpSpPr>
+        <a:xfrm>
+          <a:off x="0" y="0"/>
+          <a:ext cx="0" cy="0"/>
+          <a:chOff x="0" y="0"/>
+          <a:chExt cx="0" cy="0"/>
+        </a:xfrm>
+      </p:grpSpPr>
+      <p:pic>
+        <p:nvPicPr>
+          <p:cNvPr id="5" name="図 4">
+            <a:extLst>
+              <a:ext uri="{FF2B5EF4-FFF2-40B4-BE49-F238E27FC236}">
+                <a16:creationId xmlns:a16="http://schemas.microsoft.com/office/drawing/2014/main" id="{E878AC11-A358-47DC-B662-C5C7FF2E99D7}"/>
+              </a:ext>
+            </a:extLst>
+          </p:cNvPr>
+          <p:cNvPicPr>
+            <a:picLocks noChangeAspect="1"/>
+          </p:cNvPicPr>
+          <p:nvPr/>
+        </p:nvPicPr>
+        <p:blipFill>
+          <a:blip r:embed="rId2"/>
+          <a:stretch>
+            <a:fillRect/>
+          </a:stretch>
+        </p:blipFill>
+        <p:spPr>
+          <a:xfrm>
+            <a:off x="179294" y="1420207"/>
+            <a:ext cx="8534399" cy="4017586"/>
+          </a:xfrm>
+          <a:prstGeom prst="rect">
+            <a:avLst/>
+          </a:prstGeom>
+        </p:spPr>
+      </p:pic>
+      <p:sp>
+        <p:nvSpPr>
+          <p:cNvPr id="6" name="テキスト ボックス 5">
+            <a:extLst>
+              <a:ext uri="{FF2B5EF4-FFF2-40B4-BE49-F238E27FC236}">
+                <a16:creationId xmlns:a16="http://schemas.microsoft.com/office/drawing/2014/main" id="{78AEE755-2C4F-42DA-94D2-716CA5547CDA}"/>
+              </a:ext>
+            </a:extLst>
+          </p:cNvPr>
+          <p:cNvSpPr txBox="1"/>
+          <p:nvPr/>
+        </p:nvSpPr>
+        <p:spPr>
+          <a:xfrm>
+            <a:off x="8884023" y="1536749"/>
+            <a:ext cx="3128683" cy="1477328"/>
+          </a:xfrm>
+          <a:prstGeom prst="rect">
+            <a:avLst/>
+          </a:prstGeom>
+          <a:noFill/>
+        </p:spPr>
+        <p:txBody>
+          <a:bodyPr wrap="square" rtlCol="0">
+            <a:spAutoFit/>
+          </a:bodyPr>
+          <a:lstStyle/>
+          <a:p>
+            <a:pPr algn="ctr"/>
+            <a:r>
+              <a:rPr kumimoji="1" lang="en-US" altLang="ja-JP" b="1" dirty="0" err="1"/>
+              <a:t>ImGui</a:t>
+            </a:r>
+            <a:r>
+              <a:rPr kumimoji="1" lang="ja-JP" altLang="en-US" b="1" dirty="0"/>
+              <a:t>を使用</a:t>
+            </a:r>
+            <a:endParaRPr kumimoji="1" lang="en-US" altLang="ja-JP" b="1" dirty="0"/>
+          </a:p>
+          <a:p>
+            <a:pPr algn="ctr"/>
+            <a:endParaRPr kumimoji="1" lang="en-US" altLang="ja-JP" b="1" dirty="0"/>
+          </a:p>
+          <a:p>
+            <a:pPr algn="ctr"/>
+            <a:r>
+              <a:rPr kumimoji="1" lang="ja-JP" altLang="en-US" b="1" dirty="0"/>
+              <a:t>デバック画面を作成</a:t>
+            </a:r>
+            <a:br>
+              <a:rPr kumimoji="1" lang="en-US" altLang="ja-JP" b="1" dirty="0"/>
+            </a:br>
+            <a:r>
+              <a:rPr kumimoji="1" lang="ja-JP" altLang="en-US" b="1" dirty="0"/>
+              <a:t>ここでいろいろ実行中に</a:t>
+            </a:r>
+            <a:endParaRPr kumimoji="1" lang="en-US" altLang="ja-JP" b="1"/>
+          </a:p>
+          <a:p>
+            <a:pPr algn="ctr"/>
+            <a:r>
+              <a:rPr kumimoji="1" lang="ja-JP" altLang="en-US" b="1"/>
+              <a:t>調整</a:t>
+            </a:r>
+            <a:r>
+              <a:rPr kumimoji="1" lang="ja-JP" altLang="en-US" b="1" dirty="0"/>
+              <a:t>をする</a:t>
+            </a:r>
+          </a:p>
+        </p:txBody>
+      </p:sp>
+    </p:spTree>
+    <p:extLst>
+      <p:ext uri="{BB962C8B-B14F-4D97-AF65-F5344CB8AC3E}">
+        <p14:creationId xmlns:p14="http://schemas.microsoft.com/office/powerpoint/2010/main" val="153817779"/>
+      </p:ext>
+    </p:extLst>
+  </p:cSld>
+  <p:clrMapOvr>
+    <a:masterClrMapping/>
+  </p:clrMapOvr>
+</p:sld>
+</file>
+
+<file path=ppt/slides/slide6.xml><?xml version="1.0" encoding="utf-8"?>
+<p:sld xmlns:a="http://schemas.openxmlformats.org/drawingml/2006/main" xmlns:r="http://schemas.openxmlformats.org/officeDocument/2006/relationships" xmlns:p="http://schemas.openxmlformats.org/presentationml/2006/main">
+  <p:cSld>
+    <p:spTree>
+      <p:nvGrpSpPr>
+        <p:cNvPr id="1" name=""/>
+        <p:cNvGrpSpPr/>
+        <p:nvPr/>
+      </p:nvGrpSpPr>
+      <p:grpSpPr>
+        <a:xfrm>
+          <a:off x="0" y="0"/>
+          <a:ext cx="0" cy="0"/>
+          <a:chOff x="0" y="0"/>
+          <a:chExt cx="0" cy="0"/>
+        </a:xfrm>
+      </p:grpSpPr>
+      <p:sp>
+        <p:nvSpPr>
+          <p:cNvPr id="6" name="テキスト ボックス 5">
+            <a:extLst>
+              <a:ext uri="{FF2B5EF4-FFF2-40B4-BE49-F238E27FC236}">
+                <a16:creationId xmlns:a16="http://schemas.microsoft.com/office/drawing/2014/main" id="{92D4A413-317E-1ACA-2AC1-43ED495D1A3C}"/>
+              </a:ext>
+            </a:extLst>
+          </p:cNvPr>
+          <p:cNvSpPr txBox="1"/>
+          <p:nvPr/>
+        </p:nvSpPr>
+        <p:spPr>
+          <a:xfrm>
+            <a:off x="129309" y="544945"/>
+            <a:ext cx="8691418" cy="523220"/>
+          </a:xfrm>
+          <a:prstGeom prst="rect">
+            <a:avLst/>
+          </a:prstGeom>
+          <a:noFill/>
+        </p:spPr>
+        <p:txBody>
+          <a:bodyPr wrap="square" rtlCol="0">
+            <a:spAutoFit/>
+          </a:bodyPr>
+          <a:lstStyle/>
+          <a:p>
+            <a:r>
+              <a:rPr kumimoji="1" lang="ja-JP" altLang="en-US" sz="2800" b="1" dirty="0"/>
+              <a:t>横スクロールの２</a:t>
+            </a:r>
+            <a:r>
+              <a:rPr kumimoji="1" lang="en-US" altLang="ja-JP" sz="2800" b="1" dirty="0"/>
+              <a:t>D</a:t>
+            </a:r>
+            <a:r>
+              <a:rPr kumimoji="1" lang="ja-JP" altLang="en-US" sz="2800" b="1" dirty="0"/>
+              <a:t>ゲーム</a:t>
+            </a:r>
+          </a:p>
+        </p:txBody>
+      </p:sp>
+      <p:sp>
+        <p:nvSpPr>
+          <p:cNvPr id="7" name="テキスト ボックス 6">
+            <a:extLst>
+              <a:ext uri="{FF2B5EF4-FFF2-40B4-BE49-F238E27FC236}">
+                <a16:creationId xmlns:a16="http://schemas.microsoft.com/office/drawing/2014/main" id="{84A324D6-657F-3515-0F85-3305D74469AA}"/>
+              </a:ext>
+            </a:extLst>
+          </p:cNvPr>
+          <p:cNvSpPr txBox="1"/>
+          <p:nvPr/>
+        </p:nvSpPr>
+        <p:spPr>
+          <a:xfrm>
+            <a:off x="129309" y="914277"/>
+            <a:ext cx="7121236" cy="3108543"/>
+          </a:xfrm>
+          <a:prstGeom prst="rect">
+            <a:avLst/>
+          </a:prstGeom>
+          <a:noFill/>
+        </p:spPr>
+        <p:txBody>
+          <a:bodyPr wrap="square" rtlCol="0">
+            <a:spAutoFit/>
+          </a:bodyPr>
+          <a:lstStyle/>
+          <a:p>
+            <a:r>
+              <a:rPr lang="ja-JP" altLang="en-US" sz="2800" b="1" dirty="0"/>
+              <a:t>プレイヤーキャラは一体</a:t>
+            </a:r>
+            <a:endParaRPr lang="en-US" altLang="ja-JP" sz="2800" b="1" dirty="0"/>
+          </a:p>
+          <a:p>
+            <a:r>
+              <a:rPr lang="en-US" altLang="ja-JP" sz="2800" b="1" dirty="0"/>
+              <a:t>Level</a:t>
+            </a:r>
+          </a:p>
+          <a:p>
+            <a:r>
+              <a:rPr kumimoji="1" lang="en-US" altLang="ja-JP" sz="2800" b="1" dirty="0"/>
+              <a:t>Name</a:t>
+            </a:r>
+          </a:p>
+          <a:p>
+            <a:r>
+              <a:rPr lang="en-US" altLang="ja-JP" sz="2800" b="1" dirty="0"/>
+              <a:t>HP</a:t>
+            </a:r>
+          </a:p>
+          <a:p>
+            <a:r>
+              <a:rPr kumimoji="1" lang="en-US" altLang="ja-JP" sz="2800" b="1" dirty="0" err="1"/>
+              <a:t>Atk</a:t>
+            </a:r>
+            <a:endParaRPr kumimoji="1" lang="en-US" altLang="ja-JP" sz="2800" b="1" dirty="0"/>
+          </a:p>
+          <a:p>
+            <a:r>
+              <a:rPr kumimoji="1" lang="en-US" altLang="ja-JP" sz="2800" b="1" dirty="0"/>
+              <a:t>Def</a:t>
+            </a:r>
+          </a:p>
+          <a:p>
+            <a:r>
+              <a:rPr lang="en-US" altLang="ja-JP" sz="2800" b="1" dirty="0" err="1"/>
+              <a:t>Mp</a:t>
+            </a:r>
+            <a:endParaRPr kumimoji="1" lang="ja-JP" altLang="en-US" sz="2800" b="1" dirty="0"/>
+          </a:p>
+        </p:txBody>
+      </p:sp>
+      <p:sp>
+        <p:nvSpPr>
+          <p:cNvPr id="8" name="テキスト ボックス 7">
+            <a:extLst>
+              <a:ext uri="{FF2B5EF4-FFF2-40B4-BE49-F238E27FC236}">
+                <a16:creationId xmlns:a16="http://schemas.microsoft.com/office/drawing/2014/main" id="{8498BBFE-9475-621F-5F6B-4BA4D1CC1CA5}"/>
+              </a:ext>
+            </a:extLst>
+          </p:cNvPr>
+          <p:cNvSpPr txBox="1"/>
+          <p:nvPr/>
+        </p:nvSpPr>
+        <p:spPr>
+          <a:xfrm>
+            <a:off x="757381" y="4939845"/>
+            <a:ext cx="10584874" cy="523220"/>
+          </a:xfrm>
+          <a:prstGeom prst="rect">
+            <a:avLst/>
+          </a:prstGeom>
+          <a:noFill/>
+        </p:spPr>
+        <p:txBody>
+          <a:bodyPr wrap="square" rtlCol="0">
+            <a:spAutoFit/>
+          </a:bodyPr>
+          <a:lstStyle/>
+          <a:p>
+            <a:r>
+              <a:rPr lang="ja-JP" altLang="en-US" sz="2800" b="1" dirty="0"/>
+              <a:t>スキルは自分で好きなものをセット　スキルにレベルを持たせる</a:t>
+            </a:r>
+            <a:endParaRPr kumimoji="1" lang="ja-JP" altLang="en-US" sz="2800" b="1" dirty="0"/>
+          </a:p>
+        </p:txBody>
+      </p:sp>
+      <p:sp>
+        <p:nvSpPr>
+          <p:cNvPr id="9" name="テキスト ボックス 8">
+            <a:extLst>
+              <a:ext uri="{FF2B5EF4-FFF2-40B4-BE49-F238E27FC236}">
+                <a16:creationId xmlns:a16="http://schemas.microsoft.com/office/drawing/2014/main" id="{63219F4C-FF4D-3F95-0C61-D6EC58CCF6A2}"/>
+              </a:ext>
+            </a:extLst>
+          </p:cNvPr>
+          <p:cNvSpPr txBox="1"/>
+          <p:nvPr/>
+        </p:nvSpPr>
+        <p:spPr>
+          <a:xfrm>
+            <a:off x="757381" y="5318658"/>
+            <a:ext cx="10584874" cy="523220"/>
+          </a:xfrm>
+          <a:prstGeom prst="rect">
+            <a:avLst/>
+          </a:prstGeom>
+          <a:noFill/>
+        </p:spPr>
+        <p:txBody>
+          <a:bodyPr wrap="square" rtlCol="0">
+            <a:spAutoFit/>
+          </a:bodyPr>
+          <a:lstStyle/>
+          <a:p>
+            <a:r>
+              <a:rPr lang="ja-JP" altLang="en-US" sz="2800" b="1" dirty="0"/>
+              <a:t>スピリット　自動効果発動のもの</a:t>
+            </a:r>
+            <a:endParaRPr kumimoji="1" lang="ja-JP" altLang="en-US" sz="2800" b="1" dirty="0"/>
+          </a:p>
+        </p:txBody>
+      </p:sp>
+      <p:sp>
+        <p:nvSpPr>
+          <p:cNvPr id="10" name="テキスト ボックス 9">
+            <a:extLst>
+              <a:ext uri="{FF2B5EF4-FFF2-40B4-BE49-F238E27FC236}">
+                <a16:creationId xmlns:a16="http://schemas.microsoft.com/office/drawing/2014/main" id="{C1B95B66-2508-0177-A562-D97716488987}"/>
+              </a:ext>
+            </a:extLst>
+          </p:cNvPr>
+          <p:cNvSpPr txBox="1"/>
+          <p:nvPr/>
+        </p:nvSpPr>
+        <p:spPr>
+          <a:xfrm>
+            <a:off x="757381" y="4570512"/>
+            <a:ext cx="10584874" cy="523220"/>
+          </a:xfrm>
+          <a:prstGeom prst="rect">
+            <a:avLst/>
+          </a:prstGeom>
+          <a:noFill/>
+        </p:spPr>
+        <p:txBody>
+          <a:bodyPr wrap="square" rtlCol="0">
+            <a:spAutoFit/>
+          </a:bodyPr>
+          <a:lstStyle/>
+          <a:p>
+            <a:r>
+              <a:rPr kumimoji="1" lang="ja-JP" altLang="en-US" sz="2800" b="1" dirty="0"/>
+              <a:t>通常攻撃</a:t>
+            </a:r>
+          </a:p>
+        </p:txBody>
+      </p:sp>
+      <p:sp>
+        <p:nvSpPr>
+          <p:cNvPr id="11" name="テキスト ボックス 10">
+            <a:extLst>
+              <a:ext uri="{FF2B5EF4-FFF2-40B4-BE49-F238E27FC236}">
+                <a16:creationId xmlns:a16="http://schemas.microsoft.com/office/drawing/2014/main" id="{8B3B33B4-5D4C-CBCB-9C46-3749940306C1}"/>
+              </a:ext>
+            </a:extLst>
+          </p:cNvPr>
+          <p:cNvSpPr txBox="1"/>
+          <p:nvPr/>
+        </p:nvSpPr>
+        <p:spPr>
+          <a:xfrm>
+            <a:off x="757381" y="5789835"/>
+            <a:ext cx="10584874" cy="523220"/>
+          </a:xfrm>
+          <a:prstGeom prst="rect">
+            <a:avLst/>
+          </a:prstGeom>
+          <a:noFill/>
+        </p:spPr>
+        <p:txBody>
+          <a:bodyPr wrap="square" rtlCol="0">
+            <a:spAutoFit/>
+          </a:bodyPr>
+          <a:lstStyle/>
+          <a:p>
+            <a:r>
+              <a:rPr lang="ja-JP" altLang="en-US" sz="2800" b="1" dirty="0"/>
+              <a:t>余裕があればパッシブツリーの作成</a:t>
+            </a:r>
+            <a:endParaRPr kumimoji="1" lang="ja-JP" altLang="en-US" sz="2800" b="1" dirty="0"/>
+          </a:p>
+        </p:txBody>
+      </p:sp>
+    </p:spTree>
+    <p:extLst>
+      <p:ext uri="{BB962C8B-B14F-4D97-AF65-F5344CB8AC3E}">
+        <p14:creationId xmlns:p14="http://schemas.microsoft.com/office/powerpoint/2010/main" val="1909179945"/>
       </p:ext>
     </p:extLst>
   </p:cSld>

--- a/ゲーム制作.pptx
+++ b/ゲーム制作.pptx
@@ -202,7 +202,7 @@
           <a:p>
             <a:fld id="{5F437981-5096-4518-BF95-4CA6C8030B88}" type="datetimeFigureOut">
               <a:rPr kumimoji="1" lang="ja-JP" altLang="en-US" smtClean="0"/>
-              <a:t>2025/12/22</a:t>
+              <a:t>2025/12/25</a:t>
             </a:fld>
             <a:endParaRPr kumimoji="1" lang="ja-JP" altLang="en-US"/>
           </a:p>
@@ -732,7 +732,7 @@
           <a:p>
             <a:fld id="{4E60E38E-9C71-435A-AED7-FA148F390B6D}" type="datetimeFigureOut">
               <a:rPr kumimoji="1" lang="ja-JP" altLang="en-US" smtClean="0"/>
-              <a:t>2025/12/22</a:t>
+              <a:t>2025/12/25</a:t>
             </a:fld>
             <a:endParaRPr kumimoji="1" lang="ja-JP" altLang="en-US"/>
           </a:p>
@@ -962,7 +962,7 @@
           <a:p>
             <a:fld id="{4E60E38E-9C71-435A-AED7-FA148F390B6D}" type="datetimeFigureOut">
               <a:rPr kumimoji="1" lang="ja-JP" altLang="en-US" smtClean="0"/>
-              <a:t>2025/12/22</a:t>
+              <a:t>2025/12/25</a:t>
             </a:fld>
             <a:endParaRPr kumimoji="1" lang="ja-JP" altLang="en-US"/>
           </a:p>
@@ -1202,7 +1202,7 @@
           <a:p>
             <a:fld id="{4E60E38E-9C71-435A-AED7-FA148F390B6D}" type="datetimeFigureOut">
               <a:rPr kumimoji="1" lang="ja-JP" altLang="en-US" smtClean="0"/>
-              <a:t>2025/12/22</a:t>
+              <a:t>2025/12/25</a:t>
             </a:fld>
             <a:endParaRPr kumimoji="1" lang="ja-JP" altLang="en-US"/>
           </a:p>
@@ -1432,7 +1432,7 @@
           <a:p>
             <a:fld id="{4E60E38E-9C71-435A-AED7-FA148F390B6D}" type="datetimeFigureOut">
               <a:rPr kumimoji="1" lang="ja-JP" altLang="en-US" smtClean="0"/>
-              <a:t>2025/12/22</a:t>
+              <a:t>2025/12/25</a:t>
             </a:fld>
             <a:endParaRPr kumimoji="1" lang="ja-JP" altLang="en-US"/>
           </a:p>
@@ -1707,7 +1707,7 @@
           <a:p>
             <a:fld id="{4E60E38E-9C71-435A-AED7-FA148F390B6D}" type="datetimeFigureOut">
               <a:rPr kumimoji="1" lang="ja-JP" altLang="en-US" smtClean="0"/>
-              <a:t>2025/12/22</a:t>
+              <a:t>2025/12/25</a:t>
             </a:fld>
             <a:endParaRPr kumimoji="1" lang="ja-JP" altLang="en-US"/>
           </a:p>
@@ -2036,7 +2036,7 @@
           <a:p>
             <a:fld id="{4E60E38E-9C71-435A-AED7-FA148F390B6D}" type="datetimeFigureOut">
               <a:rPr kumimoji="1" lang="ja-JP" altLang="en-US" smtClean="0"/>
-              <a:t>2025/12/22</a:t>
+              <a:t>2025/12/25</a:t>
             </a:fld>
             <a:endParaRPr kumimoji="1" lang="ja-JP" altLang="en-US"/>
           </a:p>
@@ -2512,7 +2512,7 @@
           <a:p>
             <a:fld id="{4E60E38E-9C71-435A-AED7-FA148F390B6D}" type="datetimeFigureOut">
               <a:rPr kumimoji="1" lang="ja-JP" altLang="en-US" smtClean="0"/>
-              <a:t>2025/12/22</a:t>
+              <a:t>2025/12/25</a:t>
             </a:fld>
             <a:endParaRPr kumimoji="1" lang="ja-JP" altLang="en-US"/>
           </a:p>
@@ -2653,7 +2653,7 @@
           <a:p>
             <a:fld id="{4E60E38E-9C71-435A-AED7-FA148F390B6D}" type="datetimeFigureOut">
               <a:rPr kumimoji="1" lang="ja-JP" altLang="en-US" smtClean="0"/>
-              <a:t>2025/12/22</a:t>
+              <a:t>2025/12/25</a:t>
             </a:fld>
             <a:endParaRPr kumimoji="1" lang="ja-JP" altLang="en-US"/>
           </a:p>
@@ -2766,7 +2766,7 @@
           <a:p>
             <a:fld id="{4E60E38E-9C71-435A-AED7-FA148F390B6D}" type="datetimeFigureOut">
               <a:rPr kumimoji="1" lang="ja-JP" altLang="en-US" smtClean="0"/>
-              <a:t>2025/12/22</a:t>
+              <a:t>2025/12/25</a:t>
             </a:fld>
             <a:endParaRPr kumimoji="1" lang="ja-JP" altLang="en-US"/>
           </a:p>
@@ -3109,7 +3109,7 @@
           <a:p>
             <a:fld id="{4E60E38E-9C71-435A-AED7-FA148F390B6D}" type="datetimeFigureOut">
               <a:rPr kumimoji="1" lang="ja-JP" altLang="en-US" smtClean="0"/>
-              <a:t>2025/12/22</a:t>
+              <a:t>2025/12/25</a:t>
             </a:fld>
             <a:endParaRPr kumimoji="1" lang="ja-JP" altLang="en-US"/>
           </a:p>
@@ -3397,7 +3397,7 @@
           <a:p>
             <a:fld id="{4E60E38E-9C71-435A-AED7-FA148F390B6D}" type="datetimeFigureOut">
               <a:rPr kumimoji="1" lang="ja-JP" altLang="en-US" smtClean="0"/>
-              <a:t>2025/12/22</a:t>
+              <a:t>2025/12/25</a:t>
             </a:fld>
             <a:endParaRPr kumimoji="1" lang="ja-JP" altLang="en-US"/>
           </a:p>
@@ -3670,7 +3670,7 @@
           <a:p>
             <a:fld id="{4E60E38E-9C71-435A-AED7-FA148F390B6D}" type="datetimeFigureOut">
               <a:rPr kumimoji="1" lang="ja-JP" altLang="en-US" smtClean="0"/>
-              <a:t>2025/12/22</a:t>
+              <a:t>2025/12/25</a:t>
             </a:fld>
             <a:endParaRPr kumimoji="1" lang="ja-JP" altLang="en-US"/>
           </a:p>
@@ -4638,12 +4638,130 @@
           <a:chExt cx="0" cy="0"/>
         </a:xfrm>
       </p:grpSpPr>
+      <p:sp>
+        <p:nvSpPr>
+          <p:cNvPr id="17" name="テキスト ボックス 16">
+            <a:extLst>
+              <a:ext uri="{FF2B5EF4-FFF2-40B4-BE49-F238E27FC236}">
+                <a16:creationId xmlns:a16="http://schemas.microsoft.com/office/drawing/2014/main" id="{FE5986CF-1DCF-9AB8-7E5E-048F0B91D5A8}"/>
+              </a:ext>
+            </a:extLst>
+          </p:cNvPr>
+          <p:cNvSpPr txBox="1"/>
+          <p:nvPr/>
+        </p:nvSpPr>
+        <p:spPr>
+          <a:xfrm>
+            <a:off x="1274619" y="1543347"/>
+            <a:ext cx="2262909" cy="646331"/>
+          </a:xfrm>
+          <a:prstGeom prst="rect">
+            <a:avLst/>
+          </a:prstGeom>
+          <a:noFill/>
+        </p:spPr>
+        <p:txBody>
+          <a:bodyPr wrap="square" rtlCol="0">
+            <a:spAutoFit/>
+          </a:bodyPr>
+          <a:lstStyle/>
+          <a:p>
+            <a:pPr algn="ctr"/>
+            <a:r>
+              <a:rPr lang="ja-JP" altLang="en-US" b="1" dirty="0"/>
+              <a:t>常時発動効果とか</a:t>
+            </a:r>
+            <a:endParaRPr lang="en-US" altLang="ja-JP" b="1" dirty="0"/>
+          </a:p>
+          <a:p>
+            <a:pPr algn="ctr"/>
+            <a:r>
+              <a:rPr kumimoji="1" lang="ja-JP" altLang="en-US" b="1" dirty="0"/>
+              <a:t>バフ、デバフ</a:t>
+            </a:r>
+          </a:p>
+        </p:txBody>
+      </p:sp>
+      <p:sp>
+        <p:nvSpPr>
+          <p:cNvPr id="18" name="テキスト ボックス 17">
+            <a:extLst>
+              <a:ext uri="{FF2B5EF4-FFF2-40B4-BE49-F238E27FC236}">
+                <a16:creationId xmlns:a16="http://schemas.microsoft.com/office/drawing/2014/main" id="{C37CBC7A-FECB-B141-DDCA-16AC054EA2C2}"/>
+              </a:ext>
+            </a:extLst>
+          </p:cNvPr>
+          <p:cNvSpPr txBox="1"/>
+          <p:nvPr/>
+        </p:nvSpPr>
+        <p:spPr>
+          <a:xfrm>
+            <a:off x="1921162" y="5090771"/>
+            <a:ext cx="2262909" cy="369332"/>
+          </a:xfrm>
+          <a:prstGeom prst="rect">
+            <a:avLst/>
+          </a:prstGeom>
+          <a:noFill/>
+        </p:spPr>
+        <p:txBody>
+          <a:bodyPr wrap="square" rtlCol="0">
+            <a:spAutoFit/>
+          </a:bodyPr>
+          <a:lstStyle/>
+          <a:p>
+            <a:pPr algn="ctr"/>
+            <a:r>
+              <a:rPr lang="en-US" altLang="ja-JP" b="1" dirty="0"/>
+              <a:t>HP,MP</a:t>
+            </a:r>
+            <a:endParaRPr kumimoji="1" lang="ja-JP" altLang="en-US" b="1" dirty="0"/>
+          </a:p>
+        </p:txBody>
+      </p:sp>
+      <p:sp>
+        <p:nvSpPr>
+          <p:cNvPr id="19" name="テキスト ボックス 18">
+            <a:extLst>
+              <a:ext uri="{FF2B5EF4-FFF2-40B4-BE49-F238E27FC236}">
+                <a16:creationId xmlns:a16="http://schemas.microsoft.com/office/drawing/2014/main" id="{B2ECA0E6-BD07-D72D-0BE1-568F2DB03F0F}"/>
+              </a:ext>
+            </a:extLst>
+          </p:cNvPr>
+          <p:cNvSpPr txBox="1"/>
+          <p:nvPr/>
+        </p:nvSpPr>
+        <p:spPr>
+          <a:xfrm>
+            <a:off x="7269017" y="5136769"/>
+            <a:ext cx="2262909" cy="369332"/>
+          </a:xfrm>
+          <a:prstGeom prst="rect">
+            <a:avLst/>
+          </a:prstGeom>
+          <a:noFill/>
+        </p:spPr>
+        <p:txBody>
+          <a:bodyPr wrap="square" rtlCol="0">
+            <a:spAutoFit/>
+          </a:bodyPr>
+          <a:lstStyle/>
+          <a:p>
+            <a:pPr algn="ctr"/>
+            <a:r>
+              <a:rPr lang="ja-JP" altLang="en-US" b="1" dirty="0"/>
+              <a:t>スキル</a:t>
+            </a:r>
+            <a:endParaRPr kumimoji="1" lang="ja-JP" altLang="en-US" b="1" dirty="0"/>
+          </a:p>
+        </p:txBody>
+      </p:sp>
       <p:grpSp>
         <p:nvGrpSpPr>
-          <p:cNvPr id="16" name="グループ化 15">
-            <a:extLst>
-              <a:ext uri="{FF2B5EF4-FFF2-40B4-BE49-F238E27FC236}">
-                <a16:creationId xmlns:a16="http://schemas.microsoft.com/office/drawing/2014/main" id="{E93BFD73-7B62-F93E-7A69-7CA5763DE8DA}"/>
+          <p:cNvPr id="20" name="グループ化 19">
+            <a:extLst>
+              <a:ext uri="{FF2B5EF4-FFF2-40B4-BE49-F238E27FC236}">
+                <a16:creationId xmlns:a16="http://schemas.microsoft.com/office/drawing/2014/main" id="{F626FB12-5524-458C-B36A-FB50F3D9FF41}"/>
               </a:ext>
             </a:extLst>
           </p:cNvPr>
@@ -4654,63 +4772,592 @@
           <a:xfrm>
             <a:off x="3565236" y="1741823"/>
             <a:ext cx="5061527" cy="3374354"/>
-            <a:chOff x="3241963" y="1542473"/>
+            <a:chOff x="3565236" y="1741823"/>
             <a:chExt cx="5061527" cy="3374354"/>
           </a:xfrm>
         </p:grpSpPr>
-        <p:pic>
-          <p:nvPicPr>
-            <p:cNvPr id="4" name="Picture 2">
+        <p:grpSp>
+          <p:nvGrpSpPr>
+            <p:cNvPr id="16" name="グループ化 15">
               <a:extLst>
                 <a:ext uri="{FF2B5EF4-FFF2-40B4-BE49-F238E27FC236}">
-                  <a16:creationId xmlns:a16="http://schemas.microsoft.com/office/drawing/2014/main" id="{95ADCE84-6547-0759-0EE5-2D8630F9FF21}"/>
+                  <a16:creationId xmlns:a16="http://schemas.microsoft.com/office/drawing/2014/main" id="{E93BFD73-7B62-F93E-7A69-7CA5763DE8DA}"/>
                 </a:ext>
               </a:extLst>
             </p:cNvPr>
-            <p:cNvPicPr>
-              <a:picLocks noChangeAspect="1" noChangeArrowheads="1"/>
-            </p:cNvPicPr>
+            <p:cNvGrpSpPr/>
             <p:nvPr/>
-          </p:nvPicPr>
-          <p:blipFill rotWithShape="1">
-            <a:blip r:embed="rId2">
+          </p:nvGrpSpPr>
+          <p:grpSpPr>
+            <a:xfrm>
+              <a:off x="3565236" y="1741823"/>
+              <a:ext cx="5061527" cy="3374354"/>
+              <a:chOff x="3241963" y="1542473"/>
+              <a:chExt cx="5061527" cy="3374354"/>
+            </a:xfrm>
+          </p:grpSpPr>
+          <p:pic>
+            <p:nvPicPr>
+              <p:cNvPr id="4" name="Picture 2">
+                <a:extLst>
+                  <a:ext uri="{FF2B5EF4-FFF2-40B4-BE49-F238E27FC236}">
+                    <a16:creationId xmlns:a16="http://schemas.microsoft.com/office/drawing/2014/main" id="{95ADCE84-6547-0759-0EE5-2D8630F9FF21}"/>
+                  </a:ext>
+                </a:extLst>
+              </p:cNvPr>
+              <p:cNvPicPr>
+                <a:picLocks noChangeAspect="1" noChangeArrowheads="1"/>
+              </p:cNvPicPr>
+              <p:nvPr/>
+            </p:nvPicPr>
+            <p:blipFill rotWithShape="1">
+              <a:blip r:embed="rId2">
+                <a:extLst>
+                  <a:ext uri="{28A0092B-C50C-407E-A947-70E740481C1C}">
+                    <a14:useLocalDpi xmlns:a14="http://schemas.microsoft.com/office/drawing/2010/main" val="0"/>
+                  </a:ext>
+                </a:extLst>
+              </a:blip>
+              <a:srcRect l="32216" t="39039" r="53718" b="44617"/>
+              <a:stretch>
+                <a:fillRect/>
+              </a:stretch>
+            </p:blipFill>
+            <p:spPr bwMode="auto">
+              <a:xfrm>
+                <a:off x="3241963" y="1542473"/>
+                <a:ext cx="5061527" cy="3374354"/>
+              </a:xfrm>
+              <a:prstGeom prst="rect">
+                <a:avLst/>
+              </a:prstGeom>
+              <a:noFill/>
               <a:extLst>
-                <a:ext uri="{28A0092B-C50C-407E-A947-70E740481C1C}">
-                  <a14:useLocalDpi xmlns:a14="http://schemas.microsoft.com/office/drawing/2010/main" val="0"/>
+                <a:ext uri="{909E8E84-426E-40DD-AFC4-6F175D3DCCD1}">
+                  <a14:hiddenFill xmlns:a14="http://schemas.microsoft.com/office/drawing/2010/main">
+                    <a:solidFill>
+                      <a:srgbClr val="FFFFFF"/>
+                    </a:solidFill>
+                  </a14:hiddenFill>
                 </a:ext>
               </a:extLst>
-            </a:blip>
-            <a:srcRect l="32216" t="39039" r="53718" b="44617"/>
-            <a:stretch>
-              <a:fillRect/>
-            </a:stretch>
-          </p:blipFill>
-          <p:spPr bwMode="auto">
-            <a:xfrm>
-              <a:off x="3241963" y="1542473"/>
-              <a:ext cx="5061527" cy="3374354"/>
-            </a:xfrm>
-            <a:prstGeom prst="rect">
-              <a:avLst/>
-            </a:prstGeom>
-            <a:noFill/>
-            <a:extLst>
-              <a:ext uri="{909E8E84-426E-40DD-AFC4-6F175D3DCCD1}">
-                <a14:hiddenFill xmlns:a14="http://schemas.microsoft.com/office/drawing/2010/main">
-                  <a:solidFill>
-                    <a:srgbClr val="FFFFFF"/>
-                  </a:solidFill>
-                </a14:hiddenFill>
-              </a:ext>
-            </a:extLst>
-          </p:spPr>
-        </p:pic>
+            </p:spPr>
+          </p:pic>
+          <p:sp>
+            <p:nvSpPr>
+              <p:cNvPr id="5" name="正方形/長方形 4">
+                <a:extLst>
+                  <a:ext uri="{FF2B5EF4-FFF2-40B4-BE49-F238E27FC236}">
+                    <a16:creationId xmlns:a16="http://schemas.microsoft.com/office/drawing/2014/main" id="{F1609139-B198-F235-2244-130C19D91911}"/>
+                  </a:ext>
+                </a:extLst>
+              </p:cNvPr>
+              <p:cNvSpPr/>
+              <p:nvPr/>
+            </p:nvSpPr>
+            <p:spPr>
+              <a:xfrm>
+                <a:off x="3325091" y="4562763"/>
+                <a:ext cx="1108363" cy="115454"/>
+              </a:xfrm>
+              <a:prstGeom prst="rect">
+                <a:avLst/>
+              </a:prstGeom>
+              <a:solidFill>
+                <a:schemeClr val="accent6"/>
+              </a:solidFill>
+              <a:ln>
+                <a:noFill/>
+              </a:ln>
+            </p:spPr>
+            <p:style>
+              <a:lnRef idx="2">
+                <a:schemeClr val="accent1">
+                  <a:shade val="15000"/>
+                </a:schemeClr>
+              </a:lnRef>
+              <a:fillRef idx="1">
+                <a:schemeClr val="accent1"/>
+              </a:fillRef>
+              <a:effectRef idx="0">
+                <a:schemeClr val="accent1"/>
+              </a:effectRef>
+              <a:fontRef idx="minor">
+                <a:schemeClr val="lt1"/>
+              </a:fontRef>
+            </p:style>
+            <p:txBody>
+              <a:bodyPr rtlCol="0" anchor="ctr"/>
+              <a:lstStyle/>
+              <a:p>
+                <a:pPr algn="ctr"/>
+                <a:endParaRPr kumimoji="1" lang="ja-JP" altLang="en-US"/>
+              </a:p>
+            </p:txBody>
+          </p:sp>
+          <p:sp>
+            <p:nvSpPr>
+              <p:cNvPr id="6" name="正方形/長方形 5">
+                <a:extLst>
+                  <a:ext uri="{FF2B5EF4-FFF2-40B4-BE49-F238E27FC236}">
+                    <a16:creationId xmlns:a16="http://schemas.microsoft.com/office/drawing/2014/main" id="{883AD5DD-3115-5366-3A09-A6EB96CE677F}"/>
+                  </a:ext>
+                </a:extLst>
+              </p:cNvPr>
+              <p:cNvSpPr/>
+              <p:nvPr/>
+            </p:nvSpPr>
+            <p:spPr>
+              <a:xfrm>
+                <a:off x="3325091" y="4724399"/>
+                <a:ext cx="1108363" cy="115454"/>
+              </a:xfrm>
+              <a:prstGeom prst="rect">
+                <a:avLst/>
+              </a:prstGeom>
+              <a:solidFill>
+                <a:schemeClr val="accent4">
+                  <a:lumMod val="40000"/>
+                  <a:lumOff val="60000"/>
+                </a:schemeClr>
+              </a:solidFill>
+              <a:ln>
+                <a:solidFill>
+                  <a:schemeClr val="accent2"/>
+                </a:solidFill>
+              </a:ln>
+            </p:spPr>
+            <p:style>
+              <a:lnRef idx="2">
+                <a:schemeClr val="accent1">
+                  <a:shade val="15000"/>
+                </a:schemeClr>
+              </a:lnRef>
+              <a:fillRef idx="1">
+                <a:schemeClr val="accent1"/>
+              </a:fillRef>
+              <a:effectRef idx="0">
+                <a:schemeClr val="accent1"/>
+              </a:effectRef>
+              <a:fontRef idx="minor">
+                <a:schemeClr val="lt1"/>
+              </a:fontRef>
+            </p:style>
+            <p:txBody>
+              <a:bodyPr rtlCol="0" anchor="ctr"/>
+              <a:lstStyle/>
+              <a:p>
+                <a:pPr algn="ctr"/>
+                <a:endParaRPr kumimoji="1" lang="ja-JP" altLang="en-US"/>
+              </a:p>
+            </p:txBody>
+          </p:sp>
+          <p:sp>
+            <p:nvSpPr>
+              <p:cNvPr id="7" name="正方形/長方形 6">
+                <a:extLst>
+                  <a:ext uri="{FF2B5EF4-FFF2-40B4-BE49-F238E27FC236}">
+                    <a16:creationId xmlns:a16="http://schemas.microsoft.com/office/drawing/2014/main" id="{0D596357-8D79-686C-7112-FA7D77B75911}"/>
+                  </a:ext>
+                </a:extLst>
+              </p:cNvPr>
+              <p:cNvSpPr/>
+              <p:nvPr/>
+            </p:nvSpPr>
+            <p:spPr>
+              <a:xfrm>
+                <a:off x="6908800" y="4618181"/>
+                <a:ext cx="221672" cy="221672"/>
+              </a:xfrm>
+              <a:prstGeom prst="rect">
+                <a:avLst/>
+              </a:prstGeom>
+              <a:solidFill>
+                <a:schemeClr val="accent4">
+                  <a:lumMod val="40000"/>
+                  <a:lumOff val="60000"/>
+                </a:schemeClr>
+              </a:solidFill>
+              <a:ln>
+                <a:solidFill>
+                  <a:schemeClr val="accent2"/>
+                </a:solidFill>
+              </a:ln>
+            </p:spPr>
+            <p:style>
+              <a:lnRef idx="2">
+                <a:schemeClr val="accent1">
+                  <a:shade val="15000"/>
+                </a:schemeClr>
+              </a:lnRef>
+              <a:fillRef idx="1">
+                <a:schemeClr val="accent1"/>
+              </a:fillRef>
+              <a:effectRef idx="0">
+                <a:schemeClr val="accent1"/>
+              </a:effectRef>
+              <a:fontRef idx="minor">
+                <a:schemeClr val="lt1"/>
+              </a:fontRef>
+            </p:style>
+            <p:txBody>
+              <a:bodyPr rtlCol="0" anchor="ctr"/>
+              <a:lstStyle/>
+              <a:p>
+                <a:pPr algn="ctr"/>
+                <a:endParaRPr kumimoji="1" lang="ja-JP" altLang="en-US"/>
+              </a:p>
+            </p:txBody>
+          </p:sp>
+          <p:sp>
+            <p:nvSpPr>
+              <p:cNvPr id="10" name="正方形/長方形 9">
+                <a:extLst>
+                  <a:ext uri="{FF2B5EF4-FFF2-40B4-BE49-F238E27FC236}">
+                    <a16:creationId xmlns:a16="http://schemas.microsoft.com/office/drawing/2014/main" id="{1EE04B8E-2292-7E21-E45F-C2F654C75525}"/>
+                  </a:ext>
+                </a:extLst>
+              </p:cNvPr>
+              <p:cNvSpPr/>
+              <p:nvPr/>
+            </p:nvSpPr>
+            <p:spPr>
+              <a:xfrm>
+                <a:off x="7139709" y="4618181"/>
+                <a:ext cx="221672" cy="221672"/>
+              </a:xfrm>
+              <a:prstGeom prst="rect">
+                <a:avLst/>
+              </a:prstGeom>
+              <a:solidFill>
+                <a:schemeClr val="accent4">
+                  <a:lumMod val="40000"/>
+                  <a:lumOff val="60000"/>
+                </a:schemeClr>
+              </a:solidFill>
+              <a:ln>
+                <a:solidFill>
+                  <a:schemeClr val="accent2"/>
+                </a:solidFill>
+              </a:ln>
+            </p:spPr>
+            <p:style>
+              <a:lnRef idx="2">
+                <a:schemeClr val="accent1">
+                  <a:shade val="15000"/>
+                </a:schemeClr>
+              </a:lnRef>
+              <a:fillRef idx="1">
+                <a:schemeClr val="accent1"/>
+              </a:fillRef>
+              <a:effectRef idx="0">
+                <a:schemeClr val="accent1"/>
+              </a:effectRef>
+              <a:fontRef idx="minor">
+                <a:schemeClr val="lt1"/>
+              </a:fontRef>
+            </p:style>
+            <p:txBody>
+              <a:bodyPr rtlCol="0" anchor="ctr"/>
+              <a:lstStyle/>
+              <a:p>
+                <a:pPr algn="ctr"/>
+                <a:endParaRPr kumimoji="1" lang="ja-JP" altLang="en-US"/>
+              </a:p>
+            </p:txBody>
+          </p:sp>
+          <p:sp>
+            <p:nvSpPr>
+              <p:cNvPr id="11" name="正方形/長方形 10">
+                <a:extLst>
+                  <a:ext uri="{FF2B5EF4-FFF2-40B4-BE49-F238E27FC236}">
+                    <a16:creationId xmlns:a16="http://schemas.microsoft.com/office/drawing/2014/main" id="{749F8210-3C3F-E8C9-CA15-6F169468BD56}"/>
+                  </a:ext>
+                </a:extLst>
+              </p:cNvPr>
+              <p:cNvSpPr/>
+              <p:nvPr/>
+            </p:nvSpPr>
+            <p:spPr>
+              <a:xfrm>
+                <a:off x="7370618" y="4618181"/>
+                <a:ext cx="221672" cy="221672"/>
+              </a:xfrm>
+              <a:prstGeom prst="rect">
+                <a:avLst/>
+              </a:prstGeom>
+              <a:solidFill>
+                <a:schemeClr val="accent4">
+                  <a:lumMod val="40000"/>
+                  <a:lumOff val="60000"/>
+                </a:schemeClr>
+              </a:solidFill>
+              <a:ln>
+                <a:solidFill>
+                  <a:schemeClr val="accent2"/>
+                </a:solidFill>
+              </a:ln>
+            </p:spPr>
+            <p:style>
+              <a:lnRef idx="2">
+                <a:schemeClr val="accent1">
+                  <a:shade val="15000"/>
+                </a:schemeClr>
+              </a:lnRef>
+              <a:fillRef idx="1">
+                <a:schemeClr val="accent1"/>
+              </a:fillRef>
+              <a:effectRef idx="0">
+                <a:schemeClr val="accent1"/>
+              </a:effectRef>
+              <a:fontRef idx="minor">
+                <a:schemeClr val="lt1"/>
+              </a:fontRef>
+            </p:style>
+            <p:txBody>
+              <a:bodyPr rtlCol="0" anchor="ctr"/>
+              <a:lstStyle/>
+              <a:p>
+                <a:pPr algn="ctr"/>
+                <a:endParaRPr kumimoji="1" lang="ja-JP" altLang="en-US"/>
+              </a:p>
+            </p:txBody>
+          </p:sp>
+          <p:sp>
+            <p:nvSpPr>
+              <p:cNvPr id="12" name="正方形/長方形 11">
+                <a:extLst>
+                  <a:ext uri="{FF2B5EF4-FFF2-40B4-BE49-F238E27FC236}">
+                    <a16:creationId xmlns:a16="http://schemas.microsoft.com/office/drawing/2014/main" id="{C7D25AC5-9169-C10A-BC6E-BD89F3D592FB}"/>
+                  </a:ext>
+                </a:extLst>
+              </p:cNvPr>
+              <p:cNvSpPr/>
+              <p:nvPr/>
+            </p:nvSpPr>
+            <p:spPr>
+              <a:xfrm>
+                <a:off x="7601527" y="4618181"/>
+                <a:ext cx="221672" cy="221672"/>
+              </a:xfrm>
+              <a:prstGeom prst="rect">
+                <a:avLst/>
+              </a:prstGeom>
+              <a:solidFill>
+                <a:schemeClr val="accent4">
+                  <a:lumMod val="40000"/>
+                  <a:lumOff val="60000"/>
+                </a:schemeClr>
+              </a:solidFill>
+              <a:ln>
+                <a:solidFill>
+                  <a:schemeClr val="accent2"/>
+                </a:solidFill>
+              </a:ln>
+            </p:spPr>
+            <p:style>
+              <a:lnRef idx="2">
+                <a:schemeClr val="accent1">
+                  <a:shade val="15000"/>
+                </a:schemeClr>
+              </a:lnRef>
+              <a:fillRef idx="1">
+                <a:schemeClr val="accent1"/>
+              </a:fillRef>
+              <a:effectRef idx="0">
+                <a:schemeClr val="accent1"/>
+              </a:effectRef>
+              <a:fontRef idx="minor">
+                <a:schemeClr val="lt1"/>
+              </a:fontRef>
+            </p:style>
+            <p:txBody>
+              <a:bodyPr rtlCol="0" anchor="ctr"/>
+              <a:lstStyle/>
+              <a:p>
+                <a:pPr algn="ctr"/>
+                <a:endParaRPr kumimoji="1" lang="ja-JP" altLang="en-US"/>
+              </a:p>
+            </p:txBody>
+          </p:sp>
+          <p:sp>
+            <p:nvSpPr>
+              <p:cNvPr id="13" name="正方形/長方形 12">
+                <a:extLst>
+                  <a:ext uri="{FF2B5EF4-FFF2-40B4-BE49-F238E27FC236}">
+                    <a16:creationId xmlns:a16="http://schemas.microsoft.com/office/drawing/2014/main" id="{A110DB0E-FD81-B4DC-6EAF-0E8B3A94E959}"/>
+                  </a:ext>
+                </a:extLst>
+              </p:cNvPr>
+              <p:cNvSpPr/>
+              <p:nvPr/>
+            </p:nvSpPr>
+            <p:spPr>
+              <a:xfrm>
+                <a:off x="7841675" y="4618181"/>
+                <a:ext cx="221672" cy="221672"/>
+              </a:xfrm>
+              <a:prstGeom prst="rect">
+                <a:avLst/>
+              </a:prstGeom>
+              <a:solidFill>
+                <a:schemeClr val="accent4">
+                  <a:lumMod val="40000"/>
+                  <a:lumOff val="60000"/>
+                </a:schemeClr>
+              </a:solidFill>
+              <a:ln>
+                <a:solidFill>
+                  <a:schemeClr val="accent2"/>
+                </a:solidFill>
+              </a:ln>
+            </p:spPr>
+            <p:style>
+              <a:lnRef idx="2">
+                <a:schemeClr val="accent1">
+                  <a:shade val="15000"/>
+                </a:schemeClr>
+              </a:lnRef>
+              <a:fillRef idx="1">
+                <a:schemeClr val="accent1"/>
+              </a:fillRef>
+              <a:effectRef idx="0">
+                <a:schemeClr val="accent1"/>
+              </a:effectRef>
+              <a:fontRef idx="minor">
+                <a:schemeClr val="lt1"/>
+              </a:fontRef>
+            </p:style>
+            <p:txBody>
+              <a:bodyPr rtlCol="0" anchor="ctr"/>
+              <a:lstStyle/>
+              <a:p>
+                <a:pPr algn="ctr"/>
+                <a:endParaRPr kumimoji="1" lang="ja-JP" altLang="en-US"/>
+              </a:p>
+            </p:txBody>
+          </p:sp>
+          <p:sp>
+            <p:nvSpPr>
+              <p:cNvPr id="14" name="正方形/長方形 13">
+                <a:extLst>
+                  <a:ext uri="{FF2B5EF4-FFF2-40B4-BE49-F238E27FC236}">
+                    <a16:creationId xmlns:a16="http://schemas.microsoft.com/office/drawing/2014/main" id="{577A027D-4A3C-5FA4-983E-77A2FCF920FA}"/>
+                  </a:ext>
+                </a:extLst>
+              </p:cNvPr>
+              <p:cNvSpPr/>
+              <p:nvPr/>
+            </p:nvSpPr>
+            <p:spPr>
+              <a:xfrm>
+                <a:off x="3325091" y="1667163"/>
+                <a:ext cx="221672" cy="221672"/>
+              </a:xfrm>
+              <a:prstGeom prst="rect">
+                <a:avLst/>
+              </a:prstGeom>
+              <a:solidFill>
+                <a:schemeClr val="accent4">
+                  <a:lumMod val="40000"/>
+                  <a:lumOff val="60000"/>
+                </a:schemeClr>
+              </a:solidFill>
+              <a:ln>
+                <a:solidFill>
+                  <a:schemeClr val="accent2"/>
+                </a:solidFill>
+              </a:ln>
+            </p:spPr>
+            <p:style>
+              <a:lnRef idx="2">
+                <a:schemeClr val="accent1">
+                  <a:shade val="15000"/>
+                </a:schemeClr>
+              </a:lnRef>
+              <a:fillRef idx="1">
+                <a:schemeClr val="accent1"/>
+              </a:fillRef>
+              <a:effectRef idx="0">
+                <a:schemeClr val="accent1"/>
+              </a:effectRef>
+              <a:fontRef idx="minor">
+                <a:schemeClr val="lt1"/>
+              </a:fontRef>
+            </p:style>
+            <p:txBody>
+              <a:bodyPr rtlCol="0" anchor="ctr"/>
+              <a:lstStyle/>
+              <a:p>
+                <a:pPr algn="ctr"/>
+                <a:endParaRPr kumimoji="1" lang="ja-JP" altLang="en-US"/>
+              </a:p>
+            </p:txBody>
+          </p:sp>
+          <p:sp>
+            <p:nvSpPr>
+              <p:cNvPr id="15" name="正方形/長方形 14">
+                <a:extLst>
+                  <a:ext uri="{FF2B5EF4-FFF2-40B4-BE49-F238E27FC236}">
+                    <a16:creationId xmlns:a16="http://schemas.microsoft.com/office/drawing/2014/main" id="{0FE59D80-35F5-C013-78F5-6363B4FFBF81}"/>
+                  </a:ext>
+                </a:extLst>
+              </p:cNvPr>
+              <p:cNvSpPr/>
+              <p:nvPr/>
+            </p:nvSpPr>
+            <p:spPr>
+              <a:xfrm>
+                <a:off x="3546763" y="1667163"/>
+                <a:ext cx="221672" cy="221672"/>
+              </a:xfrm>
+              <a:prstGeom prst="rect">
+                <a:avLst/>
+              </a:prstGeom>
+              <a:solidFill>
+                <a:schemeClr val="accent4">
+                  <a:lumMod val="40000"/>
+                  <a:lumOff val="60000"/>
+                </a:schemeClr>
+              </a:solidFill>
+              <a:ln>
+                <a:solidFill>
+                  <a:schemeClr val="accent2"/>
+                </a:solidFill>
+              </a:ln>
+            </p:spPr>
+            <p:style>
+              <a:lnRef idx="2">
+                <a:schemeClr val="accent1">
+                  <a:shade val="15000"/>
+                </a:schemeClr>
+              </a:lnRef>
+              <a:fillRef idx="1">
+                <a:schemeClr val="accent1"/>
+              </a:fillRef>
+              <a:effectRef idx="0">
+                <a:schemeClr val="accent1"/>
+              </a:effectRef>
+              <a:fontRef idx="minor">
+                <a:schemeClr val="lt1"/>
+              </a:fontRef>
+            </p:style>
+            <p:txBody>
+              <a:bodyPr rtlCol="0" anchor="ctr"/>
+              <a:lstStyle/>
+              <a:p>
+                <a:pPr algn="ctr"/>
+                <a:endParaRPr kumimoji="1" lang="ja-JP" altLang="en-US"/>
+              </a:p>
+            </p:txBody>
+          </p:sp>
+        </p:grpSp>
         <p:sp>
           <p:nvSpPr>
-            <p:cNvPr id="5" name="正方形/長方形 4">
+            <p:cNvPr id="2" name="楕円 1">
               <a:extLst>
                 <a:ext uri="{FF2B5EF4-FFF2-40B4-BE49-F238E27FC236}">
-                  <a16:creationId xmlns:a16="http://schemas.microsoft.com/office/drawing/2014/main" id="{F1609139-B198-F235-2244-130C19D91911}"/>
+                  <a16:creationId xmlns:a16="http://schemas.microsoft.com/office/drawing/2014/main" id="{988E75D1-E5E5-4759-8416-5E30EB64A1FF}"/>
                 </a:ext>
               </a:extLst>
             </p:cNvPr>
@@ -4719,14 +5366,17 @@
           </p:nvSpPr>
           <p:spPr>
             <a:xfrm>
-              <a:off x="3325091" y="4562763"/>
-              <a:ext cx="1588654" cy="110837"/>
+              <a:off x="5843631" y="3962400"/>
+              <a:ext cx="504738" cy="504738"/>
             </a:xfrm>
-            <a:prstGeom prst="rect">
+            <a:prstGeom prst="ellipse">
               <a:avLst/>
             </a:prstGeom>
             <a:solidFill>
-              <a:schemeClr val="accent6"/>
+              <a:schemeClr val="accent4">
+                <a:lumMod val="40000"/>
+                <a:lumOff val="60000"/>
+              </a:schemeClr>
             </a:solidFill>
             <a:ln>
               <a:noFill/>
@@ -4735,7 +5385,7 @@
           <p:style>
             <a:lnRef idx="2">
               <a:schemeClr val="accent1">
-                <a:shade val="15000"/>
+                <a:shade val="50000"/>
               </a:schemeClr>
             </a:lnRef>
             <a:fillRef idx="1">
@@ -4759,10 +5409,10 @@
         </p:sp>
         <p:sp>
           <p:nvSpPr>
-            <p:cNvPr id="6" name="正方形/長方形 5">
+            <p:cNvPr id="3" name="正方形/長方形 2">
               <a:extLst>
                 <a:ext uri="{FF2B5EF4-FFF2-40B4-BE49-F238E27FC236}">
-                  <a16:creationId xmlns:a16="http://schemas.microsoft.com/office/drawing/2014/main" id="{883AD5DD-3115-5366-3A09-A6EB96CE677F}"/>
+                  <a16:creationId xmlns:a16="http://schemas.microsoft.com/office/drawing/2014/main" id="{607C5764-B2C1-A0B1-1FAC-DC1E3A94E5CA}"/>
                 </a:ext>
               </a:extLst>
             </p:cNvPr>
@@ -4771,422 +5421,15 @@
           </p:nvSpPr>
           <p:spPr>
             <a:xfrm>
-              <a:off x="3325091" y="4724399"/>
-              <a:ext cx="1588654" cy="110837"/>
+              <a:off x="4849091" y="4978400"/>
+              <a:ext cx="2253673" cy="60803"/>
             </a:xfrm>
             <a:prstGeom prst="rect">
               <a:avLst/>
             </a:prstGeom>
             <a:solidFill>
-              <a:schemeClr val="accent4">
-                <a:lumMod val="40000"/>
-                <a:lumOff val="60000"/>
-              </a:schemeClr>
+              <a:schemeClr val="accent2"/>
             </a:solidFill>
-            <a:ln>
-              <a:solidFill>
-                <a:schemeClr val="accent2"/>
-              </a:solidFill>
-            </a:ln>
-          </p:spPr>
-          <p:style>
-            <a:lnRef idx="2">
-              <a:schemeClr val="accent1">
-                <a:shade val="15000"/>
-              </a:schemeClr>
-            </a:lnRef>
-            <a:fillRef idx="1">
-              <a:schemeClr val="accent1"/>
-            </a:fillRef>
-            <a:effectRef idx="0">
-              <a:schemeClr val="accent1"/>
-            </a:effectRef>
-            <a:fontRef idx="minor">
-              <a:schemeClr val="lt1"/>
-            </a:fontRef>
-          </p:style>
-          <p:txBody>
-            <a:bodyPr rtlCol="0" anchor="ctr"/>
-            <a:lstStyle/>
-            <a:p>
-              <a:pPr algn="ctr"/>
-              <a:endParaRPr kumimoji="1" lang="ja-JP" altLang="en-US"/>
-            </a:p>
-          </p:txBody>
-        </p:sp>
-        <p:sp>
-          <p:nvSpPr>
-            <p:cNvPr id="7" name="正方形/長方形 6">
-              <a:extLst>
-                <a:ext uri="{FF2B5EF4-FFF2-40B4-BE49-F238E27FC236}">
-                  <a16:creationId xmlns:a16="http://schemas.microsoft.com/office/drawing/2014/main" id="{0D596357-8D79-686C-7112-FA7D77B75911}"/>
-                </a:ext>
-              </a:extLst>
-            </p:cNvPr>
-            <p:cNvSpPr/>
-            <p:nvPr/>
-          </p:nvSpPr>
-          <p:spPr>
-            <a:xfrm>
-              <a:off x="6908800" y="4618181"/>
-              <a:ext cx="221672" cy="221672"/>
-            </a:xfrm>
-            <a:prstGeom prst="rect">
-              <a:avLst/>
-            </a:prstGeom>
-            <a:solidFill>
-              <a:schemeClr val="accent4">
-                <a:lumMod val="40000"/>
-                <a:lumOff val="60000"/>
-              </a:schemeClr>
-            </a:solidFill>
-            <a:ln>
-              <a:solidFill>
-                <a:schemeClr val="accent2"/>
-              </a:solidFill>
-            </a:ln>
-          </p:spPr>
-          <p:style>
-            <a:lnRef idx="2">
-              <a:schemeClr val="accent1">
-                <a:shade val="15000"/>
-              </a:schemeClr>
-            </a:lnRef>
-            <a:fillRef idx="1">
-              <a:schemeClr val="accent1"/>
-            </a:fillRef>
-            <a:effectRef idx="0">
-              <a:schemeClr val="accent1"/>
-            </a:effectRef>
-            <a:fontRef idx="minor">
-              <a:schemeClr val="lt1"/>
-            </a:fontRef>
-          </p:style>
-          <p:txBody>
-            <a:bodyPr rtlCol="0" anchor="ctr"/>
-            <a:lstStyle/>
-            <a:p>
-              <a:pPr algn="ctr"/>
-              <a:endParaRPr kumimoji="1" lang="ja-JP" altLang="en-US"/>
-            </a:p>
-          </p:txBody>
-        </p:sp>
-        <p:sp>
-          <p:nvSpPr>
-            <p:cNvPr id="10" name="正方形/長方形 9">
-              <a:extLst>
-                <a:ext uri="{FF2B5EF4-FFF2-40B4-BE49-F238E27FC236}">
-                  <a16:creationId xmlns:a16="http://schemas.microsoft.com/office/drawing/2014/main" id="{1EE04B8E-2292-7E21-E45F-C2F654C75525}"/>
-                </a:ext>
-              </a:extLst>
-            </p:cNvPr>
-            <p:cNvSpPr/>
-            <p:nvPr/>
-          </p:nvSpPr>
-          <p:spPr>
-            <a:xfrm>
-              <a:off x="7139709" y="4618181"/>
-              <a:ext cx="221672" cy="221672"/>
-            </a:xfrm>
-            <a:prstGeom prst="rect">
-              <a:avLst/>
-            </a:prstGeom>
-            <a:solidFill>
-              <a:schemeClr val="accent4">
-                <a:lumMod val="40000"/>
-                <a:lumOff val="60000"/>
-              </a:schemeClr>
-            </a:solidFill>
-            <a:ln>
-              <a:solidFill>
-                <a:schemeClr val="accent2"/>
-              </a:solidFill>
-            </a:ln>
-          </p:spPr>
-          <p:style>
-            <a:lnRef idx="2">
-              <a:schemeClr val="accent1">
-                <a:shade val="15000"/>
-              </a:schemeClr>
-            </a:lnRef>
-            <a:fillRef idx="1">
-              <a:schemeClr val="accent1"/>
-            </a:fillRef>
-            <a:effectRef idx="0">
-              <a:schemeClr val="accent1"/>
-            </a:effectRef>
-            <a:fontRef idx="minor">
-              <a:schemeClr val="lt1"/>
-            </a:fontRef>
-          </p:style>
-          <p:txBody>
-            <a:bodyPr rtlCol="0" anchor="ctr"/>
-            <a:lstStyle/>
-            <a:p>
-              <a:pPr algn="ctr"/>
-              <a:endParaRPr kumimoji="1" lang="ja-JP" altLang="en-US"/>
-            </a:p>
-          </p:txBody>
-        </p:sp>
-        <p:sp>
-          <p:nvSpPr>
-            <p:cNvPr id="11" name="正方形/長方形 10">
-              <a:extLst>
-                <a:ext uri="{FF2B5EF4-FFF2-40B4-BE49-F238E27FC236}">
-                  <a16:creationId xmlns:a16="http://schemas.microsoft.com/office/drawing/2014/main" id="{749F8210-3C3F-E8C9-CA15-6F169468BD56}"/>
-                </a:ext>
-              </a:extLst>
-            </p:cNvPr>
-            <p:cNvSpPr/>
-            <p:nvPr/>
-          </p:nvSpPr>
-          <p:spPr>
-            <a:xfrm>
-              <a:off x="7370618" y="4618181"/>
-              <a:ext cx="221672" cy="221672"/>
-            </a:xfrm>
-            <a:prstGeom prst="rect">
-              <a:avLst/>
-            </a:prstGeom>
-            <a:solidFill>
-              <a:schemeClr val="accent4">
-                <a:lumMod val="40000"/>
-                <a:lumOff val="60000"/>
-              </a:schemeClr>
-            </a:solidFill>
-            <a:ln>
-              <a:solidFill>
-                <a:schemeClr val="accent2"/>
-              </a:solidFill>
-            </a:ln>
-          </p:spPr>
-          <p:style>
-            <a:lnRef idx="2">
-              <a:schemeClr val="accent1">
-                <a:shade val="15000"/>
-              </a:schemeClr>
-            </a:lnRef>
-            <a:fillRef idx="1">
-              <a:schemeClr val="accent1"/>
-            </a:fillRef>
-            <a:effectRef idx="0">
-              <a:schemeClr val="accent1"/>
-            </a:effectRef>
-            <a:fontRef idx="minor">
-              <a:schemeClr val="lt1"/>
-            </a:fontRef>
-          </p:style>
-          <p:txBody>
-            <a:bodyPr rtlCol="0" anchor="ctr"/>
-            <a:lstStyle/>
-            <a:p>
-              <a:pPr algn="ctr"/>
-              <a:endParaRPr kumimoji="1" lang="ja-JP" altLang="en-US"/>
-            </a:p>
-          </p:txBody>
-        </p:sp>
-        <p:sp>
-          <p:nvSpPr>
-            <p:cNvPr id="12" name="正方形/長方形 11">
-              <a:extLst>
-                <a:ext uri="{FF2B5EF4-FFF2-40B4-BE49-F238E27FC236}">
-                  <a16:creationId xmlns:a16="http://schemas.microsoft.com/office/drawing/2014/main" id="{C7D25AC5-9169-C10A-BC6E-BD89F3D592FB}"/>
-                </a:ext>
-              </a:extLst>
-            </p:cNvPr>
-            <p:cNvSpPr/>
-            <p:nvPr/>
-          </p:nvSpPr>
-          <p:spPr>
-            <a:xfrm>
-              <a:off x="7601527" y="4618181"/>
-              <a:ext cx="221672" cy="221672"/>
-            </a:xfrm>
-            <a:prstGeom prst="rect">
-              <a:avLst/>
-            </a:prstGeom>
-            <a:solidFill>
-              <a:schemeClr val="accent4">
-                <a:lumMod val="40000"/>
-                <a:lumOff val="60000"/>
-              </a:schemeClr>
-            </a:solidFill>
-            <a:ln>
-              <a:solidFill>
-                <a:schemeClr val="accent2"/>
-              </a:solidFill>
-            </a:ln>
-          </p:spPr>
-          <p:style>
-            <a:lnRef idx="2">
-              <a:schemeClr val="accent1">
-                <a:shade val="15000"/>
-              </a:schemeClr>
-            </a:lnRef>
-            <a:fillRef idx="1">
-              <a:schemeClr val="accent1"/>
-            </a:fillRef>
-            <a:effectRef idx="0">
-              <a:schemeClr val="accent1"/>
-            </a:effectRef>
-            <a:fontRef idx="minor">
-              <a:schemeClr val="lt1"/>
-            </a:fontRef>
-          </p:style>
-          <p:txBody>
-            <a:bodyPr rtlCol="0" anchor="ctr"/>
-            <a:lstStyle/>
-            <a:p>
-              <a:pPr algn="ctr"/>
-              <a:endParaRPr kumimoji="1" lang="ja-JP" altLang="en-US"/>
-            </a:p>
-          </p:txBody>
-        </p:sp>
-        <p:sp>
-          <p:nvSpPr>
-            <p:cNvPr id="13" name="正方形/長方形 12">
-              <a:extLst>
-                <a:ext uri="{FF2B5EF4-FFF2-40B4-BE49-F238E27FC236}">
-                  <a16:creationId xmlns:a16="http://schemas.microsoft.com/office/drawing/2014/main" id="{A110DB0E-FD81-B4DC-6EAF-0E8B3A94E959}"/>
-                </a:ext>
-              </a:extLst>
-            </p:cNvPr>
-            <p:cNvSpPr/>
-            <p:nvPr/>
-          </p:nvSpPr>
-          <p:spPr>
-            <a:xfrm>
-              <a:off x="7841675" y="4618181"/>
-              <a:ext cx="221672" cy="221672"/>
-            </a:xfrm>
-            <a:prstGeom prst="rect">
-              <a:avLst/>
-            </a:prstGeom>
-            <a:solidFill>
-              <a:schemeClr val="accent4">
-                <a:lumMod val="40000"/>
-                <a:lumOff val="60000"/>
-              </a:schemeClr>
-            </a:solidFill>
-            <a:ln>
-              <a:solidFill>
-                <a:schemeClr val="accent2"/>
-              </a:solidFill>
-            </a:ln>
-          </p:spPr>
-          <p:style>
-            <a:lnRef idx="2">
-              <a:schemeClr val="accent1">
-                <a:shade val="15000"/>
-              </a:schemeClr>
-            </a:lnRef>
-            <a:fillRef idx="1">
-              <a:schemeClr val="accent1"/>
-            </a:fillRef>
-            <a:effectRef idx="0">
-              <a:schemeClr val="accent1"/>
-            </a:effectRef>
-            <a:fontRef idx="minor">
-              <a:schemeClr val="lt1"/>
-            </a:fontRef>
-          </p:style>
-          <p:txBody>
-            <a:bodyPr rtlCol="0" anchor="ctr"/>
-            <a:lstStyle/>
-            <a:p>
-              <a:pPr algn="ctr"/>
-              <a:endParaRPr kumimoji="1" lang="ja-JP" altLang="en-US"/>
-            </a:p>
-          </p:txBody>
-        </p:sp>
-        <p:sp>
-          <p:nvSpPr>
-            <p:cNvPr id="14" name="正方形/長方形 13">
-              <a:extLst>
-                <a:ext uri="{FF2B5EF4-FFF2-40B4-BE49-F238E27FC236}">
-                  <a16:creationId xmlns:a16="http://schemas.microsoft.com/office/drawing/2014/main" id="{577A027D-4A3C-5FA4-983E-77A2FCF920FA}"/>
-                </a:ext>
-              </a:extLst>
-            </p:cNvPr>
-            <p:cNvSpPr/>
-            <p:nvPr/>
-          </p:nvSpPr>
-          <p:spPr>
-            <a:xfrm>
-              <a:off x="3325091" y="1667163"/>
-              <a:ext cx="221672" cy="221672"/>
-            </a:xfrm>
-            <a:prstGeom prst="rect">
-              <a:avLst/>
-            </a:prstGeom>
-            <a:solidFill>
-              <a:schemeClr val="accent4">
-                <a:lumMod val="40000"/>
-                <a:lumOff val="60000"/>
-              </a:schemeClr>
-            </a:solidFill>
-            <a:ln>
-              <a:solidFill>
-                <a:schemeClr val="accent2"/>
-              </a:solidFill>
-            </a:ln>
-          </p:spPr>
-          <p:style>
-            <a:lnRef idx="2">
-              <a:schemeClr val="accent1">
-                <a:shade val="15000"/>
-              </a:schemeClr>
-            </a:lnRef>
-            <a:fillRef idx="1">
-              <a:schemeClr val="accent1"/>
-            </a:fillRef>
-            <a:effectRef idx="0">
-              <a:schemeClr val="accent1"/>
-            </a:effectRef>
-            <a:fontRef idx="minor">
-              <a:schemeClr val="lt1"/>
-            </a:fontRef>
-          </p:style>
-          <p:txBody>
-            <a:bodyPr rtlCol="0" anchor="ctr"/>
-            <a:lstStyle/>
-            <a:p>
-              <a:pPr algn="ctr"/>
-              <a:endParaRPr kumimoji="1" lang="ja-JP" altLang="en-US"/>
-            </a:p>
-          </p:txBody>
-        </p:sp>
-        <p:sp>
-          <p:nvSpPr>
-            <p:cNvPr id="15" name="正方形/長方形 14">
-              <a:extLst>
-                <a:ext uri="{FF2B5EF4-FFF2-40B4-BE49-F238E27FC236}">
-                  <a16:creationId xmlns:a16="http://schemas.microsoft.com/office/drawing/2014/main" id="{0FE59D80-35F5-C013-78F5-6363B4FFBF81}"/>
-                </a:ext>
-              </a:extLst>
-            </p:cNvPr>
-            <p:cNvSpPr/>
-            <p:nvPr/>
-          </p:nvSpPr>
-          <p:spPr>
-            <a:xfrm>
-              <a:off x="3546763" y="1667163"/>
-              <a:ext cx="221672" cy="221672"/>
-            </a:xfrm>
-            <a:prstGeom prst="rect">
-              <a:avLst/>
-            </a:prstGeom>
-            <a:solidFill>
-              <a:schemeClr val="accent4">
-                <a:lumMod val="40000"/>
-                <a:lumOff val="60000"/>
-              </a:schemeClr>
-            </a:solidFill>
-            <a:ln>
-              <a:solidFill>
-                <a:schemeClr val="accent2"/>
-              </a:solidFill>
-            </a:ln>
           </p:spPr>
           <p:style>
             <a:lnRef idx="2">
@@ -5216,10 +5459,10 @@
       </p:grpSp>
       <p:sp>
         <p:nvSpPr>
-          <p:cNvPr id="17" name="テキスト ボックス 16">
-            <a:extLst>
-              <a:ext uri="{FF2B5EF4-FFF2-40B4-BE49-F238E27FC236}">
-                <a16:creationId xmlns:a16="http://schemas.microsoft.com/office/drawing/2014/main" id="{FE5986CF-1DCF-9AB8-7E5E-048F0B91D5A8}"/>
+          <p:cNvPr id="8" name="テキスト ボックス 7">
+            <a:extLst>
+              <a:ext uri="{FF2B5EF4-FFF2-40B4-BE49-F238E27FC236}">
+                <a16:creationId xmlns:a16="http://schemas.microsoft.com/office/drawing/2014/main" id="{711D77B2-4EDC-6787-4200-A7266613F062}"/>
               </a:ext>
             </a:extLst>
           </p:cNvPr>
@@ -5228,51 +5471,7 @@
         </p:nvSpPr>
         <p:spPr>
           <a:xfrm>
-            <a:off x="1274619" y="1543347"/>
-            <a:ext cx="2262909" cy="646331"/>
-          </a:xfrm>
-          <a:prstGeom prst="rect">
-            <a:avLst/>
-          </a:prstGeom>
-          <a:noFill/>
-        </p:spPr>
-        <p:txBody>
-          <a:bodyPr wrap="square" rtlCol="0">
-            <a:spAutoFit/>
-          </a:bodyPr>
-          <a:lstStyle/>
-          <a:p>
-            <a:pPr algn="ctr"/>
-            <a:r>
-              <a:rPr lang="ja-JP" altLang="en-US" b="1" dirty="0"/>
-              <a:t>常時発動効果とか</a:t>
-            </a:r>
-            <a:endParaRPr lang="en-US" altLang="ja-JP" b="1" dirty="0"/>
-          </a:p>
-          <a:p>
-            <a:pPr algn="ctr"/>
-            <a:r>
-              <a:rPr kumimoji="1" lang="ja-JP" altLang="en-US" b="1" dirty="0"/>
-              <a:t>バフ、デバフ</a:t>
-            </a:r>
-          </a:p>
-        </p:txBody>
-      </p:sp>
-      <p:sp>
-        <p:nvSpPr>
-          <p:cNvPr id="18" name="テキスト ボックス 17">
-            <a:extLst>
-              <a:ext uri="{FF2B5EF4-FFF2-40B4-BE49-F238E27FC236}">
-                <a16:creationId xmlns:a16="http://schemas.microsoft.com/office/drawing/2014/main" id="{C37CBC7A-FECB-B141-DDCA-16AC054EA2C2}"/>
-              </a:ext>
-            </a:extLst>
-          </p:cNvPr>
-          <p:cNvSpPr txBox="1"/>
-          <p:nvPr/>
-        </p:nvSpPr>
-        <p:spPr>
-          <a:xfrm>
-            <a:off x="1921162" y="5090771"/>
+            <a:off x="4853708" y="5147113"/>
             <a:ext cx="2262909" cy="369332"/>
           </a:xfrm>
           <a:prstGeom prst="rect">
@@ -5288,102 +5487,10 @@
           <a:p>
             <a:pPr algn="ctr"/>
             <a:r>
-              <a:rPr lang="en-US" altLang="ja-JP" b="1" dirty="0"/>
-              <a:t>HP,MP</a:t>
+              <a:rPr kumimoji="1" lang="en-US" altLang="ja-JP" b="1" dirty="0"/>
+              <a:t>EXP</a:t>
             </a:r>
             <a:endParaRPr kumimoji="1" lang="ja-JP" altLang="en-US" b="1" dirty="0"/>
-          </a:p>
-        </p:txBody>
-      </p:sp>
-      <p:sp>
-        <p:nvSpPr>
-          <p:cNvPr id="19" name="テキスト ボックス 18">
-            <a:extLst>
-              <a:ext uri="{FF2B5EF4-FFF2-40B4-BE49-F238E27FC236}">
-                <a16:creationId xmlns:a16="http://schemas.microsoft.com/office/drawing/2014/main" id="{B2ECA0E6-BD07-D72D-0BE1-568F2DB03F0F}"/>
-              </a:ext>
-            </a:extLst>
-          </p:cNvPr>
-          <p:cNvSpPr txBox="1"/>
-          <p:nvPr/>
-        </p:nvSpPr>
-        <p:spPr>
-          <a:xfrm>
-            <a:off x="7269017" y="5136769"/>
-            <a:ext cx="2262909" cy="369332"/>
-          </a:xfrm>
-          <a:prstGeom prst="rect">
-            <a:avLst/>
-          </a:prstGeom>
-          <a:noFill/>
-        </p:spPr>
-        <p:txBody>
-          <a:bodyPr wrap="square" rtlCol="0">
-            <a:spAutoFit/>
-          </a:bodyPr>
-          <a:lstStyle/>
-          <a:p>
-            <a:pPr algn="ctr"/>
-            <a:r>
-              <a:rPr lang="ja-JP" altLang="en-US" b="1" dirty="0"/>
-              <a:t>スキル</a:t>
-            </a:r>
-            <a:endParaRPr kumimoji="1" lang="ja-JP" altLang="en-US" b="1" dirty="0"/>
-          </a:p>
-        </p:txBody>
-      </p:sp>
-      <p:sp>
-        <p:nvSpPr>
-          <p:cNvPr id="2" name="楕円 1">
-            <a:extLst>
-              <a:ext uri="{FF2B5EF4-FFF2-40B4-BE49-F238E27FC236}">
-                <a16:creationId xmlns:a16="http://schemas.microsoft.com/office/drawing/2014/main" id="{988E75D1-E5E5-4759-8416-5E30EB64A1FF}"/>
-              </a:ext>
-            </a:extLst>
-          </p:cNvPr>
-          <p:cNvSpPr/>
-          <p:nvPr/>
-        </p:nvSpPr>
-        <p:spPr>
-          <a:xfrm>
-            <a:off x="5843631" y="3962400"/>
-            <a:ext cx="504738" cy="504738"/>
-          </a:xfrm>
-          <a:prstGeom prst="ellipse">
-            <a:avLst/>
-          </a:prstGeom>
-          <a:solidFill>
-            <a:schemeClr val="accent4">
-              <a:lumMod val="40000"/>
-              <a:lumOff val="60000"/>
-            </a:schemeClr>
-          </a:solidFill>
-          <a:ln>
-            <a:noFill/>
-          </a:ln>
-        </p:spPr>
-        <p:style>
-          <a:lnRef idx="2">
-            <a:schemeClr val="accent1">
-              <a:shade val="50000"/>
-            </a:schemeClr>
-          </a:lnRef>
-          <a:fillRef idx="1">
-            <a:schemeClr val="accent1"/>
-          </a:fillRef>
-          <a:effectRef idx="0">
-            <a:schemeClr val="accent1"/>
-          </a:effectRef>
-          <a:fontRef idx="minor">
-            <a:schemeClr val="lt1"/>
-          </a:fontRef>
-        </p:style>
-        <p:txBody>
-          <a:bodyPr rtlCol="0" anchor="ctr"/>
-          <a:lstStyle/>
-          <a:p>
-            <a:pPr algn="ctr"/>
-            <a:endParaRPr kumimoji="1" lang="ja-JP" altLang="en-US"/>
           </a:p>
         </p:txBody>
       </p:sp>
